--- a/docs/산출물_20260927/06_ECS_화면설계서.pptx
+++ b/docs/산출물_20260927/06_ECS_화면설계서.pptx
@@ -32,12 +32,6 @@
     <p:sldId id="280" r:id="rId31"/>
     <p:sldId id="281" r:id="rId32"/>
     <p:sldId id="282" r:id="rId33"/>
-    <p:sldId id="283" r:id="rId34"/>
-    <p:sldId id="284" r:id="rId35"/>
-    <p:sldId id="285" r:id="rId36"/>
-    <p:sldId id="286" r:id="rId37"/>
-    <p:sldId id="287" r:id="rId38"/>
-    <p:sldId id="288" r:id="rId39"/>
   </p:sldIdLst>
   <p:sldSz cx="12191695" cy="6858000" type="screen4x3"/>
   <p:notesSz cx="6858000" cy="9144000"/>
@@ -3263,7 +3257,7 @@
                 </a:solidFill>
                 <a:latin typeface="맑은 고딕"/>
               </a:rPr>
-              <a:t>ECS Renewal   ·   Ver 1.3   ·   2026-09-27</a:t>
+              <a:t>ECS Renewal   ·   Ver 1.4   ·   2026-09-28</a:t>
             </a:r>
           </a:p>
         </p:txBody>
@@ -3598,7 +3592,7 @@
                 </a:solidFill>
                 <a:latin typeface="맑은 고딕"/>
               </a:rPr>
-              <a:t>LG 화학 1동 ECS  |  화면설계서  |  Ver 1.3</a:t>
+              <a:t>LG 화학 1동 ECS  |  화면설계서  |  Ver 1.4</a:t>
             </a:r>
           </a:p>
         </p:txBody>
@@ -3921,7 +3915,7 @@
                 </a:solidFill>
                 <a:latin typeface="맑은 고딕"/>
               </a:rPr>
-              <a:t>LG 화학 1동 ECS  |  화면설계서  |  Ver 1.3</a:t>
+              <a:t>LG 화학 1동 ECS  |  화면설계서  |  Ver 1.4</a:t>
             </a:r>
           </a:p>
         </p:txBody>
@@ -4075,8 +4069,8 @@
         </p:blipFill>
         <p:spPr>
           <a:xfrm>
-            <a:off x="798195" y="2436495"/>
-            <a:ext cx="7181850" cy="2533650"/>
+            <a:off x="640080" y="2566584"/>
+            <a:ext cx="7498079" cy="2273470"/>
           </a:xfrm>
           <a:prstGeom prst="rect">
             <a:avLst/>
@@ -4256,7 +4250,7 @@
                 </a:solidFill>
                 <a:latin typeface="맑은 고딕"/>
               </a:rPr>
-              <a:t>LG 화학 1동 ECS  |  화면설계서  |  Ver 1.3</a:t>
+              <a:t>LG 화학 1동 ECS  |  화면설계서  |  Ver 1.4</a:t>
             </a:r>
           </a:p>
         </p:txBody>
@@ -4603,7 +4597,7 @@
                 </a:solidFill>
                 <a:latin typeface="맑은 고딕"/>
               </a:rPr>
-              <a:t>LG 화학 1동 ECS  |  화면설계서  |  Ver 1.3</a:t>
+              <a:t>LG 화학 1동 ECS  |  화면설계서  |  Ver 1.4</a:t>
             </a:r>
           </a:p>
         </p:txBody>
@@ -4914,7 +4908,7 @@
                 </a:solidFill>
                 <a:latin typeface="맑은 고딕"/>
               </a:rPr>
-              <a:t>LG 화학 1동 ECS  |  화면설계서  |  Ver 1.3</a:t>
+              <a:t>LG 화학 1동 ECS  |  화면설계서  |  Ver 1.4</a:t>
             </a:r>
           </a:p>
         </p:txBody>
@@ -5248,7 +5242,7 @@
                 </a:solidFill>
                 <a:latin typeface="맑은 고딕"/>
               </a:rPr>
-              <a:t>LG 화학 1동 ECS  |  화면설계서  |  Ver 1.3</a:t>
+              <a:t>LG 화학 1동 ECS  |  화면설계서  |  Ver 1.4</a:t>
             </a:r>
           </a:p>
         </p:txBody>
@@ -5402,8 +5396,8 @@
         </p:blipFill>
         <p:spPr>
           <a:xfrm>
-            <a:off x="640080" y="2566584"/>
-            <a:ext cx="7498079" cy="2273470"/>
+            <a:off x="798195" y="2436495"/>
+            <a:ext cx="7181850" cy="2533650"/>
           </a:xfrm>
           <a:prstGeom prst="rect">
             <a:avLst/>
@@ -5571,7 +5565,7 @@
                 </a:solidFill>
                 <a:latin typeface="맑은 고딕"/>
               </a:rPr>
-              <a:t>LG 화학 1동 ECS  |  화면설계서  |  Ver 1.3</a:t>
+              <a:t>LG 화학 1동 ECS  |  화면설계서  |  Ver 1.4</a:t>
             </a:r>
           </a:p>
         </p:txBody>
@@ -5659,7 +5653,7 @@
                 </a:solidFill>
                 <a:latin typeface="맑은 고딕"/>
               </a:rPr>
-              <a:t>MANUAL - 크레인 수동작업</a:t>
+              <a:t>LOG - 작업 로그</a:t>
             </a:r>
           </a:p>
         </p:txBody>
@@ -5711,7 +5705,7 @@
       </p:sp>
       <p:pic>
         <p:nvPicPr>
-          <p:cNvPr id="4" name="Picture 3" descr="manual_sc_0.png"/>
+          <p:cNvPr id="4" name="Picture 3" descr="log_io_0.png"/>
           <p:cNvPicPr>
             <a:picLocks noChangeAspect="1"/>
           </p:cNvPicPr>
@@ -5725,8 +5719,8 @@
         </p:blipFill>
         <p:spPr>
           <a:xfrm>
-            <a:off x="2069782" y="1283970"/>
-            <a:ext cx="4638675" cy="4838700"/>
+            <a:off x="640080" y="1455096"/>
+            <a:ext cx="7498079" cy="4496446"/>
           </a:xfrm>
           <a:prstGeom prst="rect">
             <a:avLst/>
@@ -5775,7 +5769,7 @@
                 </a:solidFill>
                 <a:latin typeface="맑은 고딕"/>
               </a:rPr>
-              <a:t>MANUAL ▷ 수동조작 ▷ 크레인</a:t>
+              <a:t>LOG ▷ 로그 ▷ 작업로그</a:t>
             </a:r>
           </a:p>
           <a:p>
@@ -5811,43 +5805,7 @@
                 </a:solidFill>
                 <a:latin typeface="맑은 고딕"/>
               </a:rPr>
-              <a:t>크레인 한 대에 H/S(트랙)·셀 위치를 지정해 직접 이송 지시를 낸다.</a:t>
-            </a:r>
-          </a:p>
-          <a:p>
-            <a:pPr algn="l"/>
-            <a:r>
-              <a:rPr sz="600" b="0">
-                <a:solidFill>
-                  <a:srgbClr val="595959"/>
-                </a:solidFill>
-                <a:latin typeface="맑은 고딕"/>
-              </a:rPr>
-              <a:t/>
-            </a:r>
-          </a:p>
-          <a:p>
-            <a:pPr algn="l"/>
-            <a:r>
-              <a:rPr sz="1300" b="1">
-                <a:solidFill>
-                  <a:srgbClr val="1E2761"/>
-                </a:solidFill>
-                <a:latin typeface="맑은 고딕"/>
-              </a:rPr>
-              <a:t>■ 특기사항</a:t>
-            </a:r>
-          </a:p>
-          <a:p>
-            <a:pPr algn="l"/>
-            <a:r>
-              <a:rPr sz="1000" b="0">
-                <a:solidFill>
-                  <a:srgbClr val="595959"/>
-                </a:solidFill>
-                <a:latin typeface="맑은 고딕"/>
-              </a:rPr>
-              <a:t>· 그 크레인에 진행 중인 지시가 있으면 수동 지시를 거부한다.</a:t>
+              <a:t>작업 이력(JOB_MST_HIS)을 기간/작업번호/상태로 조회한다.</a:t>
             </a:r>
           </a:p>
         </p:txBody>
@@ -5882,7 +5840,7 @@
                 </a:solidFill>
                 <a:latin typeface="맑은 고딕"/>
               </a:rPr>
-              <a:t>LG 화학 1동 ECS  |  화면설계서  |  Ver 1.3</a:t>
+              <a:t>LG 화학 1동 ECS  |  화면설계서  |  Ver 1.4</a:t>
             </a:r>
           </a:p>
         </p:txBody>
@@ -5970,7 +5928,7 @@
                 </a:solidFill>
                 <a:latin typeface="맑은 고딕"/>
               </a:rPr>
-              <a:t>MANUAL - RTV(RGV) 수동작업</a:t>
+              <a:t>LOG - HOST 로그</a:t>
             </a:r>
           </a:p>
         </p:txBody>
@@ -6022,7 +5980,7 @@
       </p:sp>
       <p:pic>
         <p:nvPicPr>
-          <p:cNvPr id="4" name="Picture 3" descr="manual_rtv_0.png"/>
+          <p:cNvPr id="4" name="Picture 3" descr="log_mes_0.png"/>
           <p:cNvPicPr>
             <a:picLocks noChangeAspect="1"/>
           </p:cNvPicPr>
@@ -6036,8 +5994,8 @@
         </p:blipFill>
         <p:spPr>
           <a:xfrm>
-            <a:off x="2245995" y="2103120"/>
-            <a:ext cx="4286250" cy="3200400"/>
+            <a:off x="640080" y="1503883"/>
+            <a:ext cx="7498079" cy="4398873"/>
           </a:xfrm>
           <a:prstGeom prst="rect">
             <a:avLst/>
@@ -6086,7 +6044,7 @@
                 </a:solidFill>
                 <a:latin typeface="맑은 고딕"/>
               </a:rPr>
-              <a:t>MANUAL ▷ 수동조작 ▷ RTV</a:t>
+              <a:t>LOG ▷ 로그 ▷ HOST로그</a:t>
             </a:r>
           </a:p>
           <a:p>
@@ -6122,7 +6080,7 @@
                 </a:solidFill>
                 <a:latin typeface="맑은 고딕"/>
               </a:rPr>
-              <a:t>RGV 에 출발지/도착지 트랙을 지정해 직접 반송 지시를 낸다.</a:t>
+              <a:t>상위(WMS/IMS)와 주고받은 전문 이력(HOST_IF_LOG)을 조회한다.</a:t>
             </a:r>
           </a:p>
           <a:p>
@@ -6158,7 +6116,7 @@
                 </a:solidFill>
                 <a:latin typeface="맑은 고딕"/>
               </a:rPr>
-              <a:t>· 출발지=도착지 지시와, 진행 중 지시가 있을 때의 지시는 거부된다.</a:t>
+              <a:t>· 전문 : O(작업지시) R(응답) M(모드 전환) S(상태보고) E(에러보고) F(완료)</a:t>
             </a:r>
           </a:p>
         </p:txBody>
@@ -6193,7 +6151,7 @@
                 </a:solidFill>
                 <a:latin typeface="맑은 고딕"/>
               </a:rPr>
-              <a:t>LG 화학 1동 ECS  |  화면설계서  |  Ver 1.3</a:t>
+              <a:t>LG 화학 1동 ECS  |  화면설계서  |  Ver 1.4</a:t>
             </a:r>
           </a:p>
         </p:txBody>
@@ -6281,7 +6239,7 @@
                 </a:solidFill>
                 <a:latin typeface="맑은 고딕"/>
               </a:rPr>
-              <a:t>LOG - 작업 로그</a:t>
+              <a:t>LOG - 설비에러이력</a:t>
             </a:r>
           </a:p>
         </p:txBody>
@@ -6333,7 +6291,7 @@
       </p:sp>
       <p:pic>
         <p:nvPicPr>
-          <p:cNvPr id="4" name="Picture 3" descr="log_io_0.png"/>
+          <p:cNvPr id="4" name="Picture 3" descr="log_eqp_his_0.png"/>
           <p:cNvPicPr>
             <a:picLocks noChangeAspect="1"/>
           </p:cNvPicPr>
@@ -6347,8 +6305,8 @@
         </p:blipFill>
         <p:spPr>
           <a:xfrm>
-            <a:off x="640080" y="1455096"/>
-            <a:ext cx="7498079" cy="4496446"/>
+            <a:off x="803995" y="1280160"/>
+            <a:ext cx="7170248" cy="4846320"/>
           </a:xfrm>
           <a:prstGeom prst="rect">
             <a:avLst/>
@@ -6397,7 +6355,7 @@
                 </a:solidFill>
                 <a:latin typeface="맑은 고딕"/>
               </a:rPr>
-              <a:t>LOG ▷ 로그 ▷ 작업로그</a:t>
+              <a:t>LOG ▷ 로그 ▷ 설비에러이력</a:t>
             </a:r>
           </a:p>
           <a:p>
@@ -6433,7 +6391,7 @@
                 </a:solidFill>
                 <a:latin typeface="맑은 고딕"/>
               </a:rPr>
-              <a:t>작업 이력(JOB_MST_HIS)을 기간/작업번호/상태로 조회한다.</a:t>
+              <a:t>설비(CV/SC/RTV) 에러 발생·해제 이력(EQP_ERR_HIS)을 조회한다.</a:t>
             </a:r>
           </a:p>
         </p:txBody>
@@ -6468,7 +6426,7 @@
                 </a:solidFill>
                 <a:latin typeface="맑은 고딕"/>
               </a:rPr>
-              <a:t>LG 화학 1동 ECS  |  화면설계서  |  Ver 1.3</a:t>
+              <a:t>LG 화학 1동 ECS  |  화면설계서  |  Ver 1.4</a:t>
             </a:r>
           </a:p>
         </p:txBody>
@@ -6935,7 +6893,7 @@
                           </a:solidFill>
                           <a:latin typeface="맑은 고딕"/>
                         </a:rPr>
-                        <a:t>V1.3</a:t>
+                        <a:t>V1.4</a:t>
                       </a:r>
                     </a:p>
                   </a:txBody>
@@ -6957,7 +6915,7 @@
                           </a:solidFill>
                           <a:latin typeface="맑은 고딕"/>
                         </a:rPr>
-                        <a:t>2026-09-27</a:t>
+                        <a:t>2026-09-28</a:t>
                       </a:r>
                     </a:p>
                   </a:txBody>
@@ -7023,9 +6981,9 @@
                           </a:solidFill>
                           <a:latin typeface="맑은 고딕"/>
                         </a:rPr>
-                        <a:t>통신 상태를 리본 [통신] 그룹의 삼색 신호등(WMS1·WMS2·EQP·SCH)으로 옮김(왼쪽 통신 칸 폐기),
-EQP_MST 를 접속 단위 네 행으로 정리, 작업정보 출발지·도착지에 이름표,
-C/V 상태창 항목 정리, 대화상자 최대화 동작 복구 및 네 창 최대화 금지</a:t>
+                        <a:t>크레인·RTV 수동지시 폐기, 알람은 설비 에러만(체류 알람 폐기),
+서버 프로그램(TASK) 장은 관리자 매뉴얼로 옮김, EQP_TASK 아이콘 선택(APP_ICON),
+통신 신호등·EQP_MST 네 행 정리·작업정보 이름표·최대화 동작 복구(09-27 분 포함)</a:t>
                       </a:r>
                     </a:p>
                   </a:txBody>
@@ -7070,7 +7028,7 @@
                 </a:solidFill>
                 <a:latin typeface="맑은 고딕"/>
               </a:rPr>
-              <a:t>LG 화학 1동 ECS  |  화면설계서  |  Ver 1.3</a:t>
+              <a:t>LG 화학 1동 ECS  |  화면설계서  |  Ver 1.4</a:t>
             </a:r>
           </a:p>
         </p:txBody>
@@ -7158,7 +7116,7 @@
                 </a:solidFill>
                 <a:latin typeface="맑은 고딕"/>
               </a:rPr>
-              <a:t>LOG - HOST 로그</a:t>
+              <a:t>LOG - 유저사용 로그</a:t>
             </a:r>
           </a:p>
         </p:txBody>
@@ -7210,7 +7168,7 @@
       </p:sp>
       <p:pic>
         <p:nvPicPr>
-          <p:cNvPr id="4" name="Picture 3" descr="log_mes_0.png"/>
+          <p:cNvPr id="4" name="Picture 3" descr="log_client_0.png"/>
           <p:cNvPicPr>
             <a:picLocks noChangeAspect="1"/>
           </p:cNvPicPr>
@@ -7224,8 +7182,8 @@
         </p:blipFill>
         <p:spPr>
           <a:xfrm>
-            <a:off x="640080" y="1503883"/>
-            <a:ext cx="7498079" cy="4398873"/>
+            <a:off x="756098" y="1280160"/>
+            <a:ext cx="7266042" cy="4846320"/>
           </a:xfrm>
           <a:prstGeom prst="rect">
             <a:avLst/>
@@ -7274,7 +7232,7 @@
                 </a:solidFill>
                 <a:latin typeface="맑은 고딕"/>
               </a:rPr>
-              <a:t>LOG ▷ 로그 ▷ HOST로그</a:t>
+              <a:t>LOG ▷ 로그 ▷ 유저사용로그</a:t>
             </a:r>
           </a:p>
           <a:p>
@@ -7310,43 +7268,7 @@
                 </a:solidFill>
                 <a:latin typeface="맑은 고딕"/>
               </a:rPr>
-              <a:t>상위(WMS/IMS)와 주고받은 전문 이력(HOST_IF_LOG)을 조회한다.</a:t>
-            </a:r>
-          </a:p>
-          <a:p>
-            <a:pPr algn="l"/>
-            <a:r>
-              <a:rPr sz="600" b="0">
-                <a:solidFill>
-                  <a:srgbClr val="595959"/>
-                </a:solidFill>
-                <a:latin typeface="맑은 고딕"/>
-              </a:rPr>
-              <a:t/>
-            </a:r>
-          </a:p>
-          <a:p>
-            <a:pPr algn="l"/>
-            <a:r>
-              <a:rPr sz="1300" b="1">
-                <a:solidFill>
-                  <a:srgbClr val="1E2761"/>
-                </a:solidFill>
-                <a:latin typeface="맑은 고딕"/>
-              </a:rPr>
-              <a:t>■ 특기사항</a:t>
-            </a:r>
-          </a:p>
-          <a:p>
-            <a:pPr algn="l"/>
-            <a:r>
-              <a:rPr sz="1000" b="0">
-                <a:solidFill>
-                  <a:srgbClr val="595959"/>
-                </a:solidFill>
-                <a:latin typeface="맑은 고딕"/>
-              </a:rPr>
-              <a:t>· 전문 : O(작업지시) R(응답) M(모드 전환) S(상태보고) E(에러보고) F(완료)</a:t>
+              <a:t>운전 화면에서 사람이 수행한 조작(지시/삭제/설정 변경/방향 전환) 기록(WCS_CLIENT_LOG)을 조회한다.</a:t>
             </a:r>
           </a:p>
         </p:txBody>
@@ -7381,7 +7303,7 @@
                 </a:solidFill>
                 <a:latin typeface="맑은 고딕"/>
               </a:rPr>
-              <a:t>LG 화학 1동 ECS  |  화면설계서  |  Ver 1.3</a:t>
+              <a:t>LG 화학 1동 ECS  |  화면설계서  |  Ver 1.4</a:t>
             </a:r>
           </a:p>
         </p:txBody>
@@ -7469,7 +7391,7 @@
                 </a:solidFill>
                 <a:latin typeface="맑은 고딕"/>
               </a:rPr>
-              <a:t>LOG - 설비에러이력</a:t>
+              <a:t>LOG - ECS 프로그램 이력</a:t>
             </a:r>
           </a:p>
         </p:txBody>
@@ -7521,7 +7443,7 @@
       </p:sp>
       <p:pic>
         <p:nvPicPr>
-          <p:cNvPr id="4" name="Picture 3" descr="log_eqp_his_0.png"/>
+          <p:cNvPr id="4" name="Picture 3" descr="alarm_0.png"/>
           <p:cNvPicPr>
             <a:picLocks noChangeAspect="1"/>
           </p:cNvPicPr>
@@ -7535,8 +7457,8 @@
         </p:blipFill>
         <p:spPr>
           <a:xfrm>
-            <a:off x="803995" y="1280160"/>
-            <a:ext cx="7170248" cy="4846320"/>
+            <a:off x="640080" y="1766792"/>
+            <a:ext cx="7498079" cy="3873054"/>
           </a:xfrm>
           <a:prstGeom prst="rect">
             <a:avLst/>
@@ -7585,7 +7507,7 @@
                 </a:solidFill>
                 <a:latin typeface="맑은 고딕"/>
               </a:rPr>
-              <a:t>LOG ▷ 로그 ▷ 설비에러이력</a:t>
+              <a:t>LOG ▷ 로그 ▷ ECS프로그램로그</a:t>
             </a:r>
           </a:p>
           <a:p>
@@ -7621,7 +7543,7 @@
                 </a:solidFill>
                 <a:latin typeface="맑은 고딕"/>
               </a:rPr>
-              <a:t>설비(CV/SC/RTV) 에러 발생·해제 이력(EQP_ERR_HIS)을 조회한다.</a:t>
+              <a:t>서버 프로그램(스케줄러/설비 통신/상위 통신)이 남긴 운전 이력(WCS_LOG_PGR)을 프로그램·시간·작업번호로 조회한다.</a:t>
             </a:r>
           </a:p>
         </p:txBody>
@@ -7656,7 +7578,7 @@
                 </a:solidFill>
                 <a:latin typeface="맑은 고딕"/>
               </a:rPr>
-              <a:t>LG 화학 1동 ECS  |  화면설계서  |  Ver 1.3</a:t>
+              <a:t>LG 화학 1동 ECS  |  화면설계서  |  Ver 1.4</a:t>
             </a:r>
           </a:p>
         </p:txBody>
@@ -7744,7 +7666,7 @@
                 </a:solidFill>
                 <a:latin typeface="맑은 고딕"/>
               </a:rPr>
-              <a:t>LOG - 유저사용 로그</a:t>
+              <a:t>LOG - 알람 (경고창)</a:t>
             </a:r>
           </a:p>
         </p:txBody>
@@ -7794,40 +7716,16 @@
           </a:p>
         </p:txBody>
       </p:sp>
-      <p:pic>
-        <p:nvPicPr>
-          <p:cNvPr id="4" name="Picture 3" descr="log_client_0.png"/>
-          <p:cNvPicPr>
-            <a:picLocks noChangeAspect="1"/>
-          </p:cNvPicPr>
-          <p:nvPr/>
-        </p:nvPicPr>
-        <p:blipFill>
-          <a:blip r:embed="rId2"/>
-          <a:stretch>
-            <a:fillRect/>
-          </a:stretch>
-        </p:blipFill>
-        <p:spPr>
-          <a:xfrm>
-            <a:off x="756098" y="1280160"/>
-            <a:ext cx="7266042" cy="4846320"/>
-          </a:xfrm>
-          <a:prstGeom prst="rect">
-            <a:avLst/>
-          </a:prstGeom>
-        </p:spPr>
-      </p:pic>
-      <p:sp>
-        <p:nvSpPr>
-          <p:cNvPr id="5" name="TextBox 4"/>
+      <p:sp>
+        <p:nvSpPr>
+          <p:cNvPr id="4" name="TextBox 3"/>
           <p:cNvSpPr txBox="1"/>
           <p:nvPr/>
         </p:nvSpPr>
         <p:spPr>
           <a:xfrm>
-            <a:off x="8503920" y="1188720"/>
-            <a:ext cx="3291840" cy="5029200"/>
+            <a:off x="731520" y="3383280"/>
+            <a:ext cx="7315200" cy="548640"/>
           </a:xfrm>
           <a:prstGeom prst="rect">
             <a:avLst/>
@@ -7840,77 +7738,29 @@
           </a:bodyPr>
           <a:lstStyle/>
           <a:p>
-            <a:pPr algn="l"/>
-            <a:r>
-              <a:rPr sz="1300" b="1">
-                <a:solidFill>
-                  <a:srgbClr val="1E2761"/>
-                </a:solidFill>
-                <a:latin typeface="맑은 고딕"/>
-              </a:rPr>
-              <a:t>■ 메뉴 Path</a:t>
-            </a:r>
-          </a:p>
-          <a:p>
-            <a:pPr algn="l"/>
-            <a:r>
-              <a:rPr sz="1100" b="0">
-                <a:solidFill>
-                  <a:srgbClr val="595959"/>
-                </a:solidFill>
-                <a:latin typeface="맑은 고딕"/>
-              </a:rPr>
-              <a:t>LOG ▷ 로그 ▷ 유저사용로그</a:t>
-            </a:r>
-          </a:p>
-          <a:p>
-            <a:pPr algn="l"/>
-            <a:r>
-              <a:rPr sz="600" b="0">
-                <a:solidFill>
-                  <a:srgbClr val="595959"/>
-                </a:solidFill>
-                <a:latin typeface="맑은 고딕"/>
-              </a:rPr>
-              <a:t/>
-            </a:r>
-          </a:p>
-          <a:p>
-            <a:pPr algn="l"/>
-            <a:r>
-              <a:rPr sz="1300" b="1">
-                <a:solidFill>
-                  <a:srgbClr val="1E2761"/>
-                </a:solidFill>
-                <a:latin typeface="맑은 고딕"/>
-              </a:rPr>
-              <a:t>■ 프로그램 개요</a:t>
-            </a:r>
-          </a:p>
-          <a:p>
-            <a:pPr algn="l"/>
-            <a:r>
-              <a:rPr sz="1100" b="0">
-                <a:solidFill>
-                  <a:srgbClr val="595959"/>
-                </a:solidFill>
-                <a:latin typeface="맑은 고딕"/>
-              </a:rPr>
-              <a:t>운전 화면에서 사람이 수행한 조작(지시/삭제/설정 변경/방향 전환) 기록(WCS_CLIENT_LOG)을 조회한다.</a:t>
-            </a:r>
-          </a:p>
-        </p:txBody>
-      </p:sp>
-      <p:sp>
-        <p:nvSpPr>
-          <p:cNvPr id="6" name="TextBox 5"/>
+            <a:pPr algn="ctr"/>
+            <a:r>
+              <a:rPr sz="1400" b="0">
+                <a:solidFill>
+                  <a:srgbClr val="595959"/>
+                </a:solidFill>
+                <a:latin typeface="맑은 고딕"/>
+              </a:rPr>
+              <a:t>(캡처 없음 - 오른쪽 설명 참조)</a:t>
+            </a:r>
+          </a:p>
+        </p:txBody>
+      </p:sp>
+      <p:sp>
+        <p:nvSpPr>
+          <p:cNvPr id="5" name="TextBox 4"/>
           <p:cNvSpPr txBox="1"/>
           <p:nvPr/>
         </p:nvSpPr>
         <p:spPr>
           <a:xfrm>
-            <a:off x="457200" y="6446520"/>
-            <a:ext cx="4572000" cy="320040"/>
+            <a:off x="8503920" y="1188720"/>
+            <a:ext cx="3291840" cy="5029200"/>
           </a:xfrm>
           <a:prstGeom prst="rect">
             <a:avLst/>
@@ -7925,13 +7775,156 @@
           <a:p>
             <a:pPr algn="l"/>
             <a:r>
+              <a:rPr sz="1300" b="1">
+                <a:solidFill>
+                  <a:srgbClr val="1E2761"/>
+                </a:solidFill>
+                <a:latin typeface="맑은 고딕"/>
+              </a:rPr>
+              <a:t>■ 메뉴 Path</a:t>
+            </a:r>
+          </a:p>
+          <a:p>
+            <a:pPr algn="l"/>
+            <a:r>
+              <a:rPr sz="1100" b="0">
+                <a:solidFill>
+                  <a:srgbClr val="595959"/>
+                </a:solidFill>
+                <a:latin typeface="맑은 고딕"/>
+              </a:rPr>
+              <a:t>LOG ▷ 알람 ▷ 알람  (자동 표시)</a:t>
+            </a:r>
+          </a:p>
+          <a:p>
+            <a:pPr algn="l"/>
+            <a:r>
+              <a:rPr sz="600" b="0">
+                <a:solidFill>
+                  <a:srgbClr val="595959"/>
+                </a:solidFill>
+                <a:latin typeface="맑은 고딕"/>
+              </a:rPr>
+              <a:t/>
+            </a:r>
+          </a:p>
+          <a:p>
+            <a:pPr algn="l"/>
+            <a:r>
+              <a:rPr sz="1300" b="1">
+                <a:solidFill>
+                  <a:srgbClr val="1E2761"/>
+                </a:solidFill>
+                <a:latin typeface="맑은 고딕"/>
+              </a:rPr>
+              <a:t>■ 프로그램 개요</a:t>
+            </a:r>
+          </a:p>
+          <a:p>
+            <a:pPr algn="l"/>
+            <a:r>
+              <a:rPr sz="1100" b="0">
+                <a:solidFill>
+                  <a:srgbClr val="595959"/>
+                </a:solidFill>
+                <a:latin typeface="맑은 고딕"/>
+              </a:rPr>
+              <a:t>설비 에러를 모아 보여 주는 경고창. 10초마다 조회해 에러가 있으면 화면 오른쪽 아래에 스스로 뜬다.</a:t>
+            </a:r>
+          </a:p>
+          <a:p>
+            <a:pPr algn="l"/>
+            <a:r>
+              <a:rPr sz="600" b="0">
+                <a:solidFill>
+                  <a:srgbClr val="595959"/>
+                </a:solidFill>
+                <a:latin typeface="맑은 고딕"/>
+              </a:rPr>
+              <a:t/>
+            </a:r>
+          </a:p>
+          <a:p>
+            <a:pPr algn="l"/>
+            <a:r>
+              <a:rPr sz="1300" b="1">
+                <a:solidFill>
+                  <a:srgbClr val="1E2761"/>
+                </a:solidFill>
+                <a:latin typeface="맑은 고딕"/>
+              </a:rPr>
+              <a:t>■ 특기사항</a:t>
+            </a:r>
+          </a:p>
+          <a:p>
+            <a:pPr algn="l"/>
+            <a:r>
               <a:rPr sz="1000" b="0">
                 <a:solidFill>
                   <a:srgbClr val="595959"/>
                 </a:solidFill>
                 <a:latin typeface="맑은 고딕"/>
               </a:rPr>
-              <a:t>LG 화학 1동 ECS  |  화면설계서  |  Ver 1.3</a:t>
+              <a:t>· 2026-09-28 : 오래 멈춘 화물(체류) 알람은 폐기했다. 알람은 ★설비 에러★ 가 뜰 때만 올라온다.</a:t>
+            </a:r>
+          </a:p>
+          <a:p>
+            <a:pPr algn="l"/>
+            <a:r>
+              <a:rPr sz="1000" b="0">
+                <a:solidFill>
+                  <a:srgbClr val="595959"/>
+                </a:solidFill>
+                <a:latin typeface="맑은 고딕"/>
+              </a:rPr>
+              <a:t>· [STOP] 은 음소거 후 숨긴다. 에러가 풀리면 목록에서 빠진다.</a:t>
+            </a:r>
+          </a:p>
+          <a:p>
+            <a:pPr algn="l"/>
+            <a:r>
+              <a:rPr sz="1000" b="0">
+                <a:solidFill>
+                  <a:srgbClr val="595959"/>
+                </a:solidFill>
+                <a:latin typeface="맑은 고딕"/>
+              </a:rPr>
+              <a:t>· 지난 에러는 LOG ▷ 설비에러이력 에서 본다.</a:t>
+            </a:r>
+          </a:p>
+        </p:txBody>
+      </p:sp>
+      <p:sp>
+        <p:nvSpPr>
+          <p:cNvPr id="6" name="TextBox 5"/>
+          <p:cNvSpPr txBox="1"/>
+          <p:nvPr/>
+        </p:nvSpPr>
+        <p:spPr>
+          <a:xfrm>
+            <a:off x="457200" y="6446520"/>
+            <a:ext cx="4572000" cy="320040"/>
+          </a:xfrm>
+          <a:prstGeom prst="rect">
+            <a:avLst/>
+          </a:prstGeom>
+          <a:noFill/>
+        </p:spPr>
+        <p:txBody>
+          <a:bodyPr wrap="square" anchor="t" lIns="45720" rIns="45720">
+            <a:spAutoFit/>
+          </a:bodyPr>
+          <a:lstStyle/>
+          <a:p>
+            <a:pPr algn="l"/>
+            <a:r>
+              <a:rPr sz="1000" b="0">
+                <a:solidFill>
+                  <a:srgbClr val="595959"/>
+                </a:solidFill>
+                <a:latin typeface="맑은 고딕"/>
+              </a:rPr>
+              <a:t>LG 화학 1동 ECS  |  화면설계서  |  Ver 1.4</a:t>
             </a:r>
           </a:p>
         </p:txBody>
@@ -8019,7 +8012,7 @@
                 </a:solidFill>
                 <a:latin typeface="맑은 고딕"/>
               </a:rPr>
-              <a:t>LOG - ECS 프로그램 이력</a:t>
+              <a:t>설비 대화상자 - CV 상태</a:t>
             </a:r>
           </a:p>
         </p:txBody>
@@ -8071,7 +8064,7 @@
       </p:sp>
       <p:pic>
         <p:nvPicPr>
-          <p:cNvPr id="4" name="Picture 3" descr="alarm_0.png"/>
+          <p:cNvPr id="4" name="Picture 3" descr="cv_0_v20.png"/>
           <p:cNvPicPr>
             <a:picLocks noChangeAspect="1"/>
           </p:cNvPicPr>
@@ -8085,8 +8078,8 @@
         </p:blipFill>
         <p:spPr>
           <a:xfrm>
-            <a:off x="640080" y="1766792"/>
-            <a:ext cx="7498079" cy="3873054"/>
+            <a:off x="2100360" y="1280160"/>
+            <a:ext cx="4577519" cy="4846320"/>
           </a:xfrm>
           <a:prstGeom prst="rect">
             <a:avLst/>
@@ -8135,7 +8128,7 @@
                 </a:solidFill>
                 <a:latin typeface="맑은 고딕"/>
               </a:rPr>
-              <a:t>LOG ▷ 로그 ▷ ECS프로그램로그</a:t>
+              <a:t>메인 화면에서 컨베이어 트랙 클릭</a:t>
             </a:r>
           </a:p>
           <a:p>
@@ -8171,7 +8164,79 @@
                 </a:solidFill>
                 <a:latin typeface="맑은 고딕"/>
               </a:rPr>
-              <a:t>서버 프로그램(스케줄러/설비 통신/상위 통신)이 남긴 운전 이력(WCS_LOG_PGR)을 프로그램·시간·작업번호로 조회한다.</a:t>
+              <a:t>컨베이어 트랙의 PLC 신호와 작업 정보를 보고, 작업번호 쓰기/삭제/복사/잘라내기/붙여넣기, 트랙 일시정지, H/S 배출을 수행한다.</a:t>
+            </a:r>
+          </a:p>
+          <a:p>
+            <a:pPr algn="l"/>
+            <a:r>
+              <a:rPr sz="600" b="0">
+                <a:solidFill>
+                  <a:srgbClr val="595959"/>
+                </a:solidFill>
+                <a:latin typeface="맑은 고딕"/>
+              </a:rPr>
+              <a:t/>
+            </a:r>
+          </a:p>
+          <a:p>
+            <a:pPr algn="l"/>
+            <a:r>
+              <a:rPr sz="1300" b="1">
+                <a:solidFill>
+                  <a:srgbClr val="1E2761"/>
+                </a:solidFill>
+                <a:latin typeface="맑은 고딕"/>
+              </a:rPr>
+              <a:t>■ 특기사항</a:t>
+            </a:r>
+          </a:p>
+          <a:p>
+            <a:pPr algn="l"/>
+            <a:r>
+              <a:rPr sz="1000" b="0">
+                <a:solidFill>
+                  <a:srgbClr val="595959"/>
+                </a:solidFill>
+                <a:latin typeface="맑은 고딕"/>
+              </a:rPr>
+              <a:t>· [쓰기]/[붙여넣기] 로 작업을 트랙에 올리면 통로 CV(트랙 103~120)는 상태 16(통로CV 구동중), 그 밖의 작업대는 15 로 기록된다.</a:t>
+            </a:r>
+          </a:p>
+          <a:p>
+            <a:pPr algn="l"/>
+            <a:r>
+              <a:rPr sz="1000" b="0">
+                <a:solidFill>
+                  <a:srgbClr val="595959"/>
+                </a:solidFill>
+                <a:latin typeface="맑은 고딕"/>
+              </a:rPr>
+              <a:t>· 예외 처리 [H/S 배출] 은 출고 H/S 에 놓인 작업 없는 화물을 출고대로 내보낸다(반자동 출고, 상위 보고 없음).</a:t>
+            </a:r>
+          </a:p>
+          <a:p>
+            <a:pPr algn="l"/>
+            <a:r>
+              <a:rPr sz="1000" b="0">
+                <a:solidFill>
+                  <a:srgbClr val="595959"/>
+                </a:solidFill>
+                <a:latin typeface="맑은 고딕"/>
+              </a:rPr>
+              <a:t>· 확대 버튼은 숨김(Ecs.ini ZOOM_BTN=0).</a:t>
+            </a:r>
+          </a:p>
+          <a:p>
+            <a:pPr algn="l"/>
+            <a:r>
+              <a:rPr sz="1000" b="0">
+                <a:solidFill>
+                  <a:srgbClr val="595959"/>
+                </a:solidFill>
+                <a:latin typeface="맑은 고딕"/>
+              </a:rPr>
+              <a:t>· 2026-09-27 : [입고모드] · [SC 인터락] · [RGV 인터락] 을 리소스에서 제거했다(표시만 제거, 값 경로는 그대로).</a:t>
             </a:r>
           </a:p>
         </p:txBody>
@@ -8206,7 +8271,7 @@
                 </a:solidFill>
                 <a:latin typeface="맑은 고딕"/>
               </a:rPr>
-              <a:t>LG 화학 1동 ECS  |  화면설계서  |  Ver 1.3</a:t>
+              <a:t>LG 화학 1동 ECS  |  화면설계서  |  Ver 1.4</a:t>
             </a:r>
           </a:p>
         </p:txBody>
@@ -8294,7 +8359,7 @@
                 </a:solidFill>
                 <a:latin typeface="맑은 고딕"/>
               </a:rPr>
-              <a:t>LOG - 알람 (경고창)</a:t>
+              <a:t>설비 대화상자 - SC 상태</a:t>
             </a:r>
           </a:p>
         </p:txBody>
@@ -8344,16 +8409,40 @@
           </a:p>
         </p:txBody>
       </p:sp>
-      <p:sp>
-        <p:nvSpPr>
-          <p:cNvPr id="4" name="TextBox 3"/>
+      <p:pic>
+        <p:nvPicPr>
+          <p:cNvPr id="4" name="Picture 3" descr="sc_0_v20.png"/>
+          <p:cNvPicPr>
+            <a:picLocks noChangeAspect="1"/>
+          </p:cNvPicPr>
+          <p:nvPr/>
+        </p:nvPicPr>
+        <p:blipFill>
+          <a:blip r:embed="rId2"/>
+          <a:stretch>
+            <a:fillRect/>
+          </a:stretch>
+        </p:blipFill>
+        <p:spPr>
+          <a:xfrm>
+            <a:off x="2341379" y="1280160"/>
+            <a:ext cx="4095481" cy="4846320"/>
+          </a:xfrm>
+          <a:prstGeom prst="rect">
+            <a:avLst/>
+          </a:prstGeom>
+        </p:spPr>
+      </p:pic>
+      <p:sp>
+        <p:nvSpPr>
+          <p:cNvPr id="5" name="TextBox 4"/>
           <p:cNvSpPr txBox="1"/>
           <p:nvPr/>
         </p:nvSpPr>
         <p:spPr>
           <a:xfrm>
-            <a:off x="731520" y="3383280"/>
-            <a:ext cx="7315200" cy="548640"/>
+            <a:off x="8503920" y="1188720"/>
+            <a:ext cx="3291840" cy="5029200"/>
           </a:xfrm>
           <a:prstGeom prst="rect">
             <a:avLst/>
@@ -8366,29 +8455,137 @@
           </a:bodyPr>
           <a:lstStyle/>
           <a:p>
-            <a:pPr algn="ctr"/>
-            <a:r>
-              <a:rPr sz="1400" b="0">
-                <a:solidFill>
-                  <a:srgbClr val="595959"/>
-                </a:solidFill>
-                <a:latin typeface="맑은 고딕"/>
-              </a:rPr>
-              <a:t>(캡처 없음 - 오른쪽 설명 참조)</a:t>
-            </a:r>
-          </a:p>
-        </p:txBody>
-      </p:sp>
-      <p:sp>
-        <p:nvSpPr>
-          <p:cNvPr id="5" name="TextBox 4"/>
+            <a:pPr algn="l"/>
+            <a:r>
+              <a:rPr sz="1300" b="1">
+                <a:solidFill>
+                  <a:srgbClr val="1E2761"/>
+                </a:solidFill>
+                <a:latin typeface="맑은 고딕"/>
+              </a:rPr>
+              <a:t>■ 메뉴 Path</a:t>
+            </a:r>
+          </a:p>
+          <a:p>
+            <a:pPr algn="l"/>
+            <a:r>
+              <a:rPr sz="1100" b="0">
+                <a:solidFill>
+                  <a:srgbClr val="595959"/>
+                </a:solidFill>
+                <a:latin typeface="맑은 고딕"/>
+              </a:rPr>
+              <a:t>메인 화면에서 크레인 클릭</a:t>
+            </a:r>
+          </a:p>
+          <a:p>
+            <a:pPr algn="l"/>
+            <a:r>
+              <a:rPr sz="600" b="0">
+                <a:solidFill>
+                  <a:srgbClr val="595959"/>
+                </a:solidFill>
+                <a:latin typeface="맑은 고딕"/>
+              </a:rPr>
+              <a:t/>
+            </a:r>
+          </a:p>
+          <a:p>
+            <a:pPr algn="l"/>
+            <a:r>
+              <a:rPr sz="1300" b="1">
+                <a:solidFill>
+                  <a:srgbClr val="1E2761"/>
+                </a:solidFill>
+                <a:latin typeface="맑은 고딕"/>
+              </a:rPr>
+              <a:t>■ 프로그램 개요</a:t>
+            </a:r>
+          </a:p>
+          <a:p>
+            <a:pPr algn="l"/>
+            <a:r>
+              <a:rPr sz="1100" b="0">
+                <a:solidFill>
+                  <a:srgbClr val="595959"/>
+                </a:solidFill>
+                <a:latin typeface="맑은 고딕"/>
+              </a:rPr>
+              <a:t>크레인 상태·차상 화물·좌표·에러와 작업 상태를 본다. 명령 : 지시 재전송 / 강제완료 / 수동지시, 입출고상태 : 입고 정지 / 출고 정지 / 작업금지.</a:t>
+            </a:r>
+          </a:p>
+          <a:p>
+            <a:pPr algn="l"/>
+            <a:r>
+              <a:rPr sz="600" b="0">
+                <a:solidFill>
+                  <a:srgbClr val="595959"/>
+                </a:solidFill>
+                <a:latin typeface="맑은 고딕"/>
+              </a:rPr>
+              <a:t/>
+            </a:r>
+          </a:p>
+          <a:p>
+            <a:pPr algn="l"/>
+            <a:r>
+              <a:rPr sz="1300" b="1">
+                <a:solidFill>
+                  <a:srgbClr val="1E2761"/>
+                </a:solidFill>
+                <a:latin typeface="맑은 고딕"/>
+              </a:rPr>
+              <a:t>■ 특기사항</a:t>
+            </a:r>
+          </a:p>
+          <a:p>
+            <a:pPr algn="l"/>
+            <a:r>
+              <a:rPr sz="1000" b="0">
+                <a:solidFill>
+                  <a:srgbClr val="595959"/>
+                </a:solidFill>
+                <a:latin typeface="맑은 고딕"/>
+              </a:rPr>
+              <a:t>· 제목줄에 호기와 담당 Bank 를 표시한다 (예 S/C#2 (Bank 03,04)).</a:t>
+            </a:r>
+          </a:p>
+          <a:p>
+            <a:pPr algn="l"/>
+            <a:r>
+              <a:rPr sz="1000" b="0">
+                <a:solidFill>
+                  <a:srgbClr val="595959"/>
+                </a:solidFill>
+                <a:latin typeface="맑은 고딕"/>
+              </a:rPr>
+              <a:t>· [수동지시] 는 MANUAL &gt; 크레인 창을 연다.</a:t>
+            </a:r>
+          </a:p>
+          <a:p>
+            <a:pPr algn="l"/>
+            <a:r>
+              <a:rPr sz="1000" b="0">
+                <a:solidFill>
+                  <a:srgbClr val="595959"/>
+                </a:solidFill>
+                <a:latin typeface="맑은 고딕"/>
+              </a:rPr>
+              <a:t>· 확대 버튼은 숨김(ZOOM_BTN=0).</a:t>
+            </a:r>
+          </a:p>
+        </p:txBody>
+      </p:sp>
+      <p:sp>
+        <p:nvSpPr>
+          <p:cNvPr id="6" name="TextBox 5"/>
           <p:cNvSpPr txBox="1"/>
           <p:nvPr/>
         </p:nvSpPr>
         <p:spPr>
           <a:xfrm>
-            <a:off x="8503920" y="1188720"/>
-            <a:ext cx="3291840" cy="5029200"/>
+            <a:off x="457200" y="6446520"/>
+            <a:ext cx="4572000" cy="320040"/>
           </a:xfrm>
           <a:prstGeom prst="rect">
             <a:avLst/>
@@ -8403,156 +8600,13 @@
           <a:p>
             <a:pPr algn="l"/>
             <a:r>
-              <a:rPr sz="1300" b="1">
-                <a:solidFill>
-                  <a:srgbClr val="1E2761"/>
-                </a:solidFill>
-                <a:latin typeface="맑은 고딕"/>
-              </a:rPr>
-              <a:t>■ 메뉴 Path</a:t>
-            </a:r>
-          </a:p>
-          <a:p>
-            <a:pPr algn="l"/>
-            <a:r>
-              <a:rPr sz="1100" b="0">
-                <a:solidFill>
-                  <a:srgbClr val="595959"/>
-                </a:solidFill>
-                <a:latin typeface="맑은 고딕"/>
-              </a:rPr>
-              <a:t>LOG ▷ 알람 ▷ 알람  (자동 표시)</a:t>
-            </a:r>
-          </a:p>
-          <a:p>
-            <a:pPr algn="l"/>
-            <a:r>
-              <a:rPr sz="600" b="0">
-                <a:solidFill>
-                  <a:srgbClr val="595959"/>
-                </a:solidFill>
-                <a:latin typeface="맑은 고딕"/>
-              </a:rPr>
-              <a:t/>
-            </a:r>
-          </a:p>
-          <a:p>
-            <a:pPr algn="l"/>
-            <a:r>
-              <a:rPr sz="1300" b="1">
-                <a:solidFill>
-                  <a:srgbClr val="1E2761"/>
-                </a:solidFill>
-                <a:latin typeface="맑은 고딕"/>
-              </a:rPr>
-              <a:t>■ 프로그램 개요</a:t>
-            </a:r>
-          </a:p>
-          <a:p>
-            <a:pPr algn="l"/>
-            <a:r>
-              <a:rPr sz="1100" b="0">
-                <a:solidFill>
-                  <a:srgbClr val="595959"/>
-                </a:solidFill>
-                <a:latin typeface="맑은 고딕"/>
-              </a:rPr>
-              <a:t>체류 작업과 알람을 모아 보여 주는 경고창. 10초마다 조회해 해당 건이 있으면 화면 오른쪽 아래에 스스로 뜬다.</a:t>
-            </a:r>
-          </a:p>
-          <a:p>
-            <a:pPr algn="l"/>
-            <a:r>
-              <a:rPr sz="600" b="0">
-                <a:solidFill>
-                  <a:srgbClr val="595959"/>
-                </a:solidFill>
-                <a:latin typeface="맑은 고딕"/>
-              </a:rPr>
-              <a:t/>
-            </a:r>
-          </a:p>
-          <a:p>
-            <a:pPr algn="l"/>
-            <a:r>
-              <a:rPr sz="1300" b="1">
-                <a:solidFill>
-                  <a:srgbClr val="1E2761"/>
-                </a:solidFill>
-                <a:latin typeface="맑은 고딕"/>
-              </a:rPr>
-              <a:t>■ 특기사항</a:t>
-            </a:r>
-          </a:p>
-          <a:p>
-            <a:pPr algn="l"/>
-            <a:r>
               <a:rPr sz="1000" b="0">
                 <a:solidFill>
                   <a:srgbClr val="595959"/>
                 </a:solidFill>
                 <a:latin typeface="맑은 고딕"/>
               </a:rPr>
-              <a:t>· 체류 기준 : Ecs.ini [USER] JOB_STALL_WARN_SEC=300 (최소 10초, 저장 즉시 반영).</a:t>
-            </a:r>
-          </a:p>
-          <a:p>
-            <a:pPr algn="l"/>
-            <a:r>
-              <a:rPr sz="1000" b="0">
-                <a:solidFill>
-                  <a:srgbClr val="595959"/>
-                </a:solidFill>
-                <a:latin typeface="맑은 고딕"/>
-              </a:rPr>
-              <a:t>· 목록 열 : 시각 / 작업번호 / 구분 / 체류(초) / 내용. [STOP] 은 음소거 후 숨긴다.</a:t>
-            </a:r>
-          </a:p>
-          <a:p>
-            <a:pPr algn="l"/>
-            <a:r>
-              <a:rPr sz="1000" b="0">
-                <a:solidFill>
-                  <a:srgbClr val="595959"/>
-                </a:solidFill>
-                <a:latin typeface="맑은 고딕"/>
-              </a:rPr>
-              <a:t>· 체류는 경고만 한다 - 시간 경과로 작업을 자동 완료하지 않는다(설비 신호와 실물을 확인 후 처리).</a:t>
-            </a:r>
-          </a:p>
-        </p:txBody>
-      </p:sp>
-      <p:sp>
-        <p:nvSpPr>
-          <p:cNvPr id="6" name="TextBox 5"/>
-          <p:cNvSpPr txBox="1"/>
-          <p:nvPr/>
-        </p:nvSpPr>
-        <p:spPr>
-          <a:xfrm>
-            <a:off x="457200" y="6446520"/>
-            <a:ext cx="4572000" cy="320040"/>
-          </a:xfrm>
-          <a:prstGeom prst="rect">
-            <a:avLst/>
-          </a:prstGeom>
-          <a:noFill/>
-        </p:spPr>
-        <p:txBody>
-          <a:bodyPr wrap="square" anchor="t" lIns="45720" rIns="45720">
-            <a:spAutoFit/>
-          </a:bodyPr>
-          <a:lstStyle/>
-          <a:p>
-            <a:pPr algn="l"/>
-            <a:r>
-              <a:rPr sz="1000" b="0">
-                <a:solidFill>
-                  <a:srgbClr val="595959"/>
-                </a:solidFill>
-                <a:latin typeface="맑은 고딕"/>
-              </a:rPr>
-              <a:t>LG 화학 1동 ECS  |  화면설계서  |  Ver 1.3</a:t>
+              <a:t>LG 화학 1동 ECS  |  화면설계서  |  Ver 1.4</a:t>
             </a:r>
           </a:p>
         </p:txBody>
@@ -8640,7 +8694,7 @@
                 </a:solidFill>
                 <a:latin typeface="맑은 고딕"/>
               </a:rPr>
-              <a:t>설비 대화상자 - CV 상태</a:t>
+              <a:t>설비 대화상자 - RTV(RGV) 상태</a:t>
             </a:r>
           </a:p>
         </p:txBody>
@@ -8692,688 +8746,6 @@
       </p:sp>
       <p:pic>
         <p:nvPicPr>
-          <p:cNvPr id="4" name="Picture 3" descr="cv_0_v20.png"/>
-          <p:cNvPicPr>
-            <a:picLocks noChangeAspect="1"/>
-          </p:cNvPicPr>
-          <p:nvPr/>
-        </p:nvPicPr>
-        <p:blipFill>
-          <a:blip r:embed="rId2"/>
-          <a:stretch>
-            <a:fillRect/>
-          </a:stretch>
-        </p:blipFill>
-        <p:spPr>
-          <a:xfrm>
-            <a:off x="2100360" y="1280160"/>
-            <a:ext cx="4577519" cy="4846320"/>
-          </a:xfrm>
-          <a:prstGeom prst="rect">
-            <a:avLst/>
-          </a:prstGeom>
-        </p:spPr>
-      </p:pic>
-      <p:sp>
-        <p:nvSpPr>
-          <p:cNvPr id="5" name="TextBox 4"/>
-          <p:cNvSpPr txBox="1"/>
-          <p:nvPr/>
-        </p:nvSpPr>
-        <p:spPr>
-          <a:xfrm>
-            <a:off x="8503920" y="1188720"/>
-            <a:ext cx="3291840" cy="5029200"/>
-          </a:xfrm>
-          <a:prstGeom prst="rect">
-            <a:avLst/>
-          </a:prstGeom>
-          <a:noFill/>
-        </p:spPr>
-        <p:txBody>
-          <a:bodyPr wrap="square" anchor="t" lIns="45720" rIns="45720">
-            <a:spAutoFit/>
-          </a:bodyPr>
-          <a:lstStyle/>
-          <a:p>
-            <a:pPr algn="l"/>
-            <a:r>
-              <a:rPr sz="1300" b="1">
-                <a:solidFill>
-                  <a:srgbClr val="1E2761"/>
-                </a:solidFill>
-                <a:latin typeface="맑은 고딕"/>
-              </a:rPr>
-              <a:t>■ 메뉴 Path</a:t>
-            </a:r>
-          </a:p>
-          <a:p>
-            <a:pPr algn="l"/>
-            <a:r>
-              <a:rPr sz="1100" b="0">
-                <a:solidFill>
-                  <a:srgbClr val="595959"/>
-                </a:solidFill>
-                <a:latin typeface="맑은 고딕"/>
-              </a:rPr>
-              <a:t>메인 화면에서 컨베이어 트랙 클릭</a:t>
-            </a:r>
-          </a:p>
-          <a:p>
-            <a:pPr algn="l"/>
-            <a:r>
-              <a:rPr sz="600" b="0">
-                <a:solidFill>
-                  <a:srgbClr val="595959"/>
-                </a:solidFill>
-                <a:latin typeface="맑은 고딕"/>
-              </a:rPr>
-              <a:t/>
-            </a:r>
-          </a:p>
-          <a:p>
-            <a:pPr algn="l"/>
-            <a:r>
-              <a:rPr sz="1300" b="1">
-                <a:solidFill>
-                  <a:srgbClr val="1E2761"/>
-                </a:solidFill>
-                <a:latin typeface="맑은 고딕"/>
-              </a:rPr>
-              <a:t>■ 프로그램 개요</a:t>
-            </a:r>
-          </a:p>
-          <a:p>
-            <a:pPr algn="l"/>
-            <a:r>
-              <a:rPr sz="1100" b="0">
-                <a:solidFill>
-                  <a:srgbClr val="595959"/>
-                </a:solidFill>
-                <a:latin typeface="맑은 고딕"/>
-              </a:rPr>
-              <a:t>컨베이어 트랙의 PLC 신호와 작업 정보를 보고, 작업번호 쓰기/삭제/복사/잘라내기/붙여넣기, 트랙 일시정지, H/S 배출을 수행한다.</a:t>
-            </a:r>
-          </a:p>
-          <a:p>
-            <a:pPr algn="l"/>
-            <a:r>
-              <a:rPr sz="600" b="0">
-                <a:solidFill>
-                  <a:srgbClr val="595959"/>
-                </a:solidFill>
-                <a:latin typeface="맑은 고딕"/>
-              </a:rPr>
-              <a:t/>
-            </a:r>
-          </a:p>
-          <a:p>
-            <a:pPr algn="l"/>
-            <a:r>
-              <a:rPr sz="1300" b="1">
-                <a:solidFill>
-                  <a:srgbClr val="1E2761"/>
-                </a:solidFill>
-                <a:latin typeface="맑은 고딕"/>
-              </a:rPr>
-              <a:t>■ 특기사항</a:t>
-            </a:r>
-          </a:p>
-          <a:p>
-            <a:pPr algn="l"/>
-            <a:r>
-              <a:rPr sz="1000" b="0">
-                <a:solidFill>
-                  <a:srgbClr val="595959"/>
-                </a:solidFill>
-                <a:latin typeface="맑은 고딕"/>
-              </a:rPr>
-              <a:t>· [쓰기]/[붙여넣기] 로 작업을 트랙에 올리면 통로 CV(트랙 103~120)는 상태 16(통로CV 구동중), 그 밖의 작업대는 15 로 기록된다.</a:t>
-            </a:r>
-          </a:p>
-          <a:p>
-            <a:pPr algn="l"/>
-            <a:r>
-              <a:rPr sz="1000" b="0">
-                <a:solidFill>
-                  <a:srgbClr val="595959"/>
-                </a:solidFill>
-                <a:latin typeface="맑은 고딕"/>
-              </a:rPr>
-              <a:t>· 예외 처리 [H/S 배출] 은 출고 H/S 에 놓인 작업 없는 화물을 출고대로 내보낸다(반자동 출고, 상위 보고 없음).</a:t>
-            </a:r>
-          </a:p>
-          <a:p>
-            <a:pPr algn="l"/>
-            <a:r>
-              <a:rPr sz="1000" b="0">
-                <a:solidFill>
-                  <a:srgbClr val="595959"/>
-                </a:solidFill>
-                <a:latin typeface="맑은 고딕"/>
-              </a:rPr>
-              <a:t>· 확대 버튼은 숨김(Ecs.ini ZOOM_BTN=0).</a:t>
-            </a:r>
-          </a:p>
-          <a:p>
-            <a:pPr algn="l"/>
-            <a:r>
-              <a:rPr sz="1000" b="0">
-                <a:solidFill>
-                  <a:srgbClr val="595959"/>
-                </a:solidFill>
-                <a:latin typeface="맑은 고딕"/>
-              </a:rPr>
-              <a:t>· 2026-09-27 : [입고모드] · [SC 인터락] · [RGV 인터락] 을 리소스에서 제거했다(표시만 제거, 값 경로는 그대로).</a:t>
-            </a:r>
-          </a:p>
-        </p:txBody>
-      </p:sp>
-      <p:sp>
-        <p:nvSpPr>
-          <p:cNvPr id="6" name="TextBox 5"/>
-          <p:cNvSpPr txBox="1"/>
-          <p:nvPr/>
-        </p:nvSpPr>
-        <p:spPr>
-          <a:xfrm>
-            <a:off x="457200" y="6446520"/>
-            <a:ext cx="4572000" cy="320040"/>
-          </a:xfrm>
-          <a:prstGeom prst="rect">
-            <a:avLst/>
-          </a:prstGeom>
-          <a:noFill/>
-        </p:spPr>
-        <p:txBody>
-          <a:bodyPr wrap="square" anchor="t" lIns="45720" rIns="45720">
-            <a:spAutoFit/>
-          </a:bodyPr>
-          <a:lstStyle/>
-          <a:p>
-            <a:pPr algn="l"/>
-            <a:r>
-              <a:rPr sz="1000" b="0">
-                <a:solidFill>
-                  <a:srgbClr val="595959"/>
-                </a:solidFill>
-                <a:latin typeface="맑은 고딕"/>
-              </a:rPr>
-              <a:t>LG 화학 1동 ECS  |  화면설계서  |  Ver 1.3</a:t>
-            </a:r>
-          </a:p>
-        </p:txBody>
-      </p:sp>
-      <p:sp>
-        <p:nvSpPr>
-          <p:cNvPr id="7" name="TextBox 6"/>
-          <p:cNvSpPr txBox="1"/>
-          <p:nvPr/>
-        </p:nvSpPr>
-        <p:spPr>
-          <a:xfrm>
-            <a:off x="11155680" y="6446520"/>
-            <a:ext cx="731520" cy="320040"/>
-          </a:xfrm>
-          <a:prstGeom prst="rect">
-            <a:avLst/>
-          </a:prstGeom>
-          <a:noFill/>
-        </p:spPr>
-        <p:txBody>
-          <a:bodyPr wrap="square" anchor="t" lIns="45720" rIns="45720">
-            <a:spAutoFit/>
-          </a:bodyPr>
-          <a:lstStyle/>
-          <a:p>
-            <a:pPr algn="r"/>
-            <a:r>
-              <a:rPr sz="1000" b="0">
-                <a:solidFill>
-                  <a:srgbClr val="595959"/>
-                </a:solidFill>
-                <a:latin typeface="맑은 고딕"/>
-              </a:rPr>
-              <a:t>25</a:t>
-            </a:r>
-          </a:p>
-        </p:txBody>
-      </p:sp>
-    </p:spTree>
-  </p:cSld>
-  <p:clrMapOvr>
-    <a:masterClrMapping/>
-  </p:clrMapOvr>
-</p:sld>
-</file>
-
-<file path=ppt/slides/slide26.xml><?xml version="1.0" encoding="utf-8"?>
-<p:sld xmlns:a="http://schemas.openxmlformats.org/drawingml/2006/main" xmlns:p="http://schemas.openxmlformats.org/presentationml/2006/main" xmlns:r="http://schemas.openxmlformats.org/officeDocument/2006/relationships">
-  <p:cSld>
-    <p:spTree>
-      <p:nvGrpSpPr>
-        <p:cNvPr id="1" name=""/>
-        <p:cNvGrpSpPr/>
-        <p:nvPr/>
-      </p:nvGrpSpPr>
-      <p:grpSpPr/>
-      <p:sp>
-        <p:nvSpPr>
-          <p:cNvPr id="2" name="TextBox 1"/>
-          <p:cNvSpPr txBox="1"/>
-          <p:nvPr/>
-        </p:nvSpPr>
-        <p:spPr>
-          <a:xfrm>
-            <a:off x="457200" y="274320"/>
-            <a:ext cx="11247120" cy="640080"/>
-          </a:xfrm>
-          <a:prstGeom prst="rect">
-            <a:avLst/>
-          </a:prstGeom>
-          <a:noFill/>
-        </p:spPr>
-        <p:txBody>
-          <a:bodyPr wrap="square" anchor="ctr" lIns="45720" rIns="45720">
-            <a:spAutoFit/>
-          </a:bodyPr>
-          <a:lstStyle/>
-          <a:p>
-            <a:pPr algn="l"/>
-            <a:r>
-              <a:rPr sz="2600" b="1">
-                <a:solidFill>
-                  <a:srgbClr val="1E2761"/>
-                </a:solidFill>
-                <a:latin typeface="맑은 고딕"/>
-              </a:rPr>
-              <a:t>설비 대화상자 - SC 상태</a:t>
-            </a:r>
-          </a:p>
-        </p:txBody>
-      </p:sp>
-      <p:sp>
-        <p:nvSpPr>
-          <p:cNvPr id="3" name="Rectangle 2"/>
-          <p:cNvSpPr/>
-          <p:nvPr/>
-        </p:nvSpPr>
-        <p:spPr>
-          <a:xfrm>
-            <a:off x="548640" y="1188720"/>
-            <a:ext cx="7680960" cy="5029200"/>
-          </a:xfrm>
-          <a:prstGeom prst="rect">
-            <a:avLst/>
-          </a:prstGeom>
-          <a:solidFill>
-            <a:srgbClr val="F7F8FA"/>
-          </a:solidFill>
-          <a:ln>
-            <a:solidFill>
-              <a:srgbClr val="C8CEDA"/>
-            </a:solidFill>
-          </a:ln>
-        </p:spPr>
-        <p:style>
-          <a:lnRef idx="1">
-            <a:schemeClr val="accent1"/>
-          </a:lnRef>
-          <a:fillRef idx="3">
-            <a:schemeClr val="accent1"/>
-          </a:fillRef>
-          <a:effectRef idx="2">
-            <a:schemeClr val="accent1"/>
-          </a:effectRef>
-          <a:fontRef idx="minor">
-            <a:schemeClr val="lt1"/>
-          </a:fontRef>
-        </p:style>
-        <p:txBody>
-          <a:bodyPr rtlCol="0" anchor="ctr"/>
-          <a:lstStyle/>
-          <a:p>
-            <a:pPr algn="ctr"/>
-          </a:p>
-        </p:txBody>
-      </p:sp>
-      <p:pic>
-        <p:nvPicPr>
-          <p:cNvPr id="4" name="Picture 3" descr="sc_0_v20.png"/>
-          <p:cNvPicPr>
-            <a:picLocks noChangeAspect="1"/>
-          </p:cNvPicPr>
-          <p:nvPr/>
-        </p:nvPicPr>
-        <p:blipFill>
-          <a:blip r:embed="rId2"/>
-          <a:stretch>
-            <a:fillRect/>
-          </a:stretch>
-        </p:blipFill>
-        <p:spPr>
-          <a:xfrm>
-            <a:off x="2341379" y="1280160"/>
-            <a:ext cx="4095481" cy="4846320"/>
-          </a:xfrm>
-          <a:prstGeom prst="rect">
-            <a:avLst/>
-          </a:prstGeom>
-        </p:spPr>
-      </p:pic>
-      <p:sp>
-        <p:nvSpPr>
-          <p:cNvPr id="5" name="TextBox 4"/>
-          <p:cNvSpPr txBox="1"/>
-          <p:nvPr/>
-        </p:nvSpPr>
-        <p:spPr>
-          <a:xfrm>
-            <a:off x="8503920" y="1188720"/>
-            <a:ext cx="3291840" cy="5029200"/>
-          </a:xfrm>
-          <a:prstGeom prst="rect">
-            <a:avLst/>
-          </a:prstGeom>
-          <a:noFill/>
-        </p:spPr>
-        <p:txBody>
-          <a:bodyPr wrap="square" anchor="t" lIns="45720" rIns="45720">
-            <a:spAutoFit/>
-          </a:bodyPr>
-          <a:lstStyle/>
-          <a:p>
-            <a:pPr algn="l"/>
-            <a:r>
-              <a:rPr sz="1300" b="1">
-                <a:solidFill>
-                  <a:srgbClr val="1E2761"/>
-                </a:solidFill>
-                <a:latin typeface="맑은 고딕"/>
-              </a:rPr>
-              <a:t>■ 메뉴 Path</a:t>
-            </a:r>
-          </a:p>
-          <a:p>
-            <a:pPr algn="l"/>
-            <a:r>
-              <a:rPr sz="1100" b="0">
-                <a:solidFill>
-                  <a:srgbClr val="595959"/>
-                </a:solidFill>
-                <a:latin typeface="맑은 고딕"/>
-              </a:rPr>
-              <a:t>메인 화면에서 크레인 클릭</a:t>
-            </a:r>
-          </a:p>
-          <a:p>
-            <a:pPr algn="l"/>
-            <a:r>
-              <a:rPr sz="600" b="0">
-                <a:solidFill>
-                  <a:srgbClr val="595959"/>
-                </a:solidFill>
-                <a:latin typeface="맑은 고딕"/>
-              </a:rPr>
-              <a:t/>
-            </a:r>
-          </a:p>
-          <a:p>
-            <a:pPr algn="l"/>
-            <a:r>
-              <a:rPr sz="1300" b="1">
-                <a:solidFill>
-                  <a:srgbClr val="1E2761"/>
-                </a:solidFill>
-                <a:latin typeface="맑은 고딕"/>
-              </a:rPr>
-              <a:t>■ 프로그램 개요</a:t>
-            </a:r>
-          </a:p>
-          <a:p>
-            <a:pPr algn="l"/>
-            <a:r>
-              <a:rPr sz="1100" b="0">
-                <a:solidFill>
-                  <a:srgbClr val="595959"/>
-                </a:solidFill>
-                <a:latin typeface="맑은 고딕"/>
-              </a:rPr>
-              <a:t>크레인 상태·차상 화물·좌표·에러와 작업 상태를 본다. 명령 : 지시 재전송 / 강제완료 / 수동지시, 입출고상태 : 입고 정지 / 출고 정지 / 작업금지.</a:t>
-            </a:r>
-          </a:p>
-          <a:p>
-            <a:pPr algn="l"/>
-            <a:r>
-              <a:rPr sz="600" b="0">
-                <a:solidFill>
-                  <a:srgbClr val="595959"/>
-                </a:solidFill>
-                <a:latin typeface="맑은 고딕"/>
-              </a:rPr>
-              <a:t/>
-            </a:r>
-          </a:p>
-          <a:p>
-            <a:pPr algn="l"/>
-            <a:r>
-              <a:rPr sz="1300" b="1">
-                <a:solidFill>
-                  <a:srgbClr val="1E2761"/>
-                </a:solidFill>
-                <a:latin typeface="맑은 고딕"/>
-              </a:rPr>
-              <a:t>■ 특기사항</a:t>
-            </a:r>
-          </a:p>
-          <a:p>
-            <a:pPr algn="l"/>
-            <a:r>
-              <a:rPr sz="1000" b="0">
-                <a:solidFill>
-                  <a:srgbClr val="595959"/>
-                </a:solidFill>
-                <a:latin typeface="맑은 고딕"/>
-              </a:rPr>
-              <a:t>· 제목줄에 호기와 담당 Bank 를 표시한다 (예 S/C#2 (Bank 03,04)).</a:t>
-            </a:r>
-          </a:p>
-          <a:p>
-            <a:pPr algn="l"/>
-            <a:r>
-              <a:rPr sz="1000" b="0">
-                <a:solidFill>
-                  <a:srgbClr val="595959"/>
-                </a:solidFill>
-                <a:latin typeface="맑은 고딕"/>
-              </a:rPr>
-              <a:t>· [수동지시] 는 MANUAL &gt; 크레인 창을 연다.</a:t>
-            </a:r>
-          </a:p>
-          <a:p>
-            <a:pPr algn="l"/>
-            <a:r>
-              <a:rPr sz="1000" b="0">
-                <a:solidFill>
-                  <a:srgbClr val="595959"/>
-                </a:solidFill>
-                <a:latin typeface="맑은 고딕"/>
-              </a:rPr>
-              <a:t>· 확대 버튼은 숨김(ZOOM_BTN=0).</a:t>
-            </a:r>
-          </a:p>
-        </p:txBody>
-      </p:sp>
-      <p:sp>
-        <p:nvSpPr>
-          <p:cNvPr id="6" name="TextBox 5"/>
-          <p:cNvSpPr txBox="1"/>
-          <p:nvPr/>
-        </p:nvSpPr>
-        <p:spPr>
-          <a:xfrm>
-            <a:off x="457200" y="6446520"/>
-            <a:ext cx="4572000" cy="320040"/>
-          </a:xfrm>
-          <a:prstGeom prst="rect">
-            <a:avLst/>
-          </a:prstGeom>
-          <a:noFill/>
-        </p:spPr>
-        <p:txBody>
-          <a:bodyPr wrap="square" anchor="t" lIns="45720" rIns="45720">
-            <a:spAutoFit/>
-          </a:bodyPr>
-          <a:lstStyle/>
-          <a:p>
-            <a:pPr algn="l"/>
-            <a:r>
-              <a:rPr sz="1000" b="0">
-                <a:solidFill>
-                  <a:srgbClr val="595959"/>
-                </a:solidFill>
-                <a:latin typeface="맑은 고딕"/>
-              </a:rPr>
-              <a:t>LG 화학 1동 ECS  |  화면설계서  |  Ver 1.3</a:t>
-            </a:r>
-          </a:p>
-        </p:txBody>
-      </p:sp>
-      <p:sp>
-        <p:nvSpPr>
-          <p:cNvPr id="7" name="TextBox 6"/>
-          <p:cNvSpPr txBox="1"/>
-          <p:nvPr/>
-        </p:nvSpPr>
-        <p:spPr>
-          <a:xfrm>
-            <a:off x="11155680" y="6446520"/>
-            <a:ext cx="731520" cy="320040"/>
-          </a:xfrm>
-          <a:prstGeom prst="rect">
-            <a:avLst/>
-          </a:prstGeom>
-          <a:noFill/>
-        </p:spPr>
-        <p:txBody>
-          <a:bodyPr wrap="square" anchor="t" lIns="45720" rIns="45720">
-            <a:spAutoFit/>
-          </a:bodyPr>
-          <a:lstStyle/>
-          <a:p>
-            <a:pPr algn="r"/>
-            <a:r>
-              <a:rPr sz="1000" b="0">
-                <a:solidFill>
-                  <a:srgbClr val="595959"/>
-                </a:solidFill>
-                <a:latin typeface="맑은 고딕"/>
-              </a:rPr>
-              <a:t>26</a:t>
-            </a:r>
-          </a:p>
-        </p:txBody>
-      </p:sp>
-    </p:spTree>
-  </p:cSld>
-  <p:clrMapOvr>
-    <a:masterClrMapping/>
-  </p:clrMapOvr>
-</p:sld>
-</file>
-
-<file path=ppt/slides/slide27.xml><?xml version="1.0" encoding="utf-8"?>
-<p:sld xmlns:a="http://schemas.openxmlformats.org/drawingml/2006/main" xmlns:p="http://schemas.openxmlformats.org/presentationml/2006/main" xmlns:r="http://schemas.openxmlformats.org/officeDocument/2006/relationships">
-  <p:cSld>
-    <p:spTree>
-      <p:nvGrpSpPr>
-        <p:cNvPr id="1" name=""/>
-        <p:cNvGrpSpPr/>
-        <p:nvPr/>
-      </p:nvGrpSpPr>
-      <p:grpSpPr/>
-      <p:sp>
-        <p:nvSpPr>
-          <p:cNvPr id="2" name="TextBox 1"/>
-          <p:cNvSpPr txBox="1"/>
-          <p:nvPr/>
-        </p:nvSpPr>
-        <p:spPr>
-          <a:xfrm>
-            <a:off x="457200" y="274320"/>
-            <a:ext cx="11247120" cy="640080"/>
-          </a:xfrm>
-          <a:prstGeom prst="rect">
-            <a:avLst/>
-          </a:prstGeom>
-          <a:noFill/>
-        </p:spPr>
-        <p:txBody>
-          <a:bodyPr wrap="square" anchor="ctr" lIns="45720" rIns="45720">
-            <a:spAutoFit/>
-          </a:bodyPr>
-          <a:lstStyle/>
-          <a:p>
-            <a:pPr algn="l"/>
-            <a:r>
-              <a:rPr sz="2600" b="1">
-                <a:solidFill>
-                  <a:srgbClr val="1E2761"/>
-                </a:solidFill>
-                <a:latin typeface="맑은 고딕"/>
-              </a:rPr>
-              <a:t>설비 대화상자 - RTV(RGV) 상태</a:t>
-            </a:r>
-          </a:p>
-        </p:txBody>
-      </p:sp>
-      <p:sp>
-        <p:nvSpPr>
-          <p:cNvPr id="3" name="Rectangle 2"/>
-          <p:cNvSpPr/>
-          <p:nvPr/>
-        </p:nvSpPr>
-        <p:spPr>
-          <a:xfrm>
-            <a:off x="548640" y="1188720"/>
-            <a:ext cx="7680960" cy="5029200"/>
-          </a:xfrm>
-          <a:prstGeom prst="rect">
-            <a:avLst/>
-          </a:prstGeom>
-          <a:solidFill>
-            <a:srgbClr val="F7F8FA"/>
-          </a:solidFill>
-          <a:ln>
-            <a:solidFill>
-              <a:srgbClr val="C8CEDA"/>
-            </a:solidFill>
-          </a:ln>
-        </p:spPr>
-        <p:style>
-          <a:lnRef idx="1">
-            <a:schemeClr val="accent1"/>
-          </a:lnRef>
-          <a:fillRef idx="3">
-            <a:schemeClr val="accent1"/>
-          </a:fillRef>
-          <a:effectRef idx="2">
-            <a:schemeClr val="accent1"/>
-          </a:effectRef>
-          <a:fontRef idx="minor">
-            <a:schemeClr val="lt1"/>
-          </a:fontRef>
-        </p:style>
-        <p:txBody>
-          <a:bodyPr rtlCol="0" anchor="ctr"/>
-          <a:lstStyle/>
-          <a:p>
-            <a:pPr algn="ctr"/>
-          </a:p>
-        </p:txBody>
-      </p:sp>
-      <p:pic>
-        <p:nvPicPr>
           <p:cNvPr id="4" name="Picture 3" descr="rtv_0_v13.png"/>
           <p:cNvPicPr>
             <a:picLocks noChangeAspect="1"/>
@@ -9557,7 +8929,7 @@
                 </a:solidFill>
                 <a:latin typeface="맑은 고딕"/>
               </a:rPr>
-              <a:t>LG 화학 1동 ECS  |  화면설계서  |  Ver 1.3</a:t>
+              <a:t>LG 화학 1동 ECS  |  화면설계서  |  Ver 1.4</a:t>
             </a:r>
           </a:p>
         </p:txBody>
@@ -9592,7 +8964,7 @@
                 </a:solidFill>
                 <a:latin typeface="맑은 고딕"/>
               </a:rPr>
-              <a:t>27</a:t>
+              <a:t>25</a:t>
             </a:r>
           </a:p>
         </p:txBody>
@@ -9605,2055 +8977,7 @@
 </p:sld>
 </file>
 
-<file path=ppt/slides/slide28.xml><?xml version="1.0" encoding="utf-8"?>
-<p:sld xmlns:a="http://schemas.openxmlformats.org/drawingml/2006/main" xmlns:p="http://schemas.openxmlformats.org/presentationml/2006/main" xmlns:r="http://schemas.openxmlformats.org/officeDocument/2006/relationships">
-  <p:cSld>
-    <p:spTree>
-      <p:nvGrpSpPr>
-        <p:cNvPr id="1" name=""/>
-        <p:cNvGrpSpPr/>
-        <p:nvPr/>
-      </p:nvGrpSpPr>
-      <p:grpSpPr/>
-      <p:sp>
-        <p:nvSpPr>
-          <p:cNvPr id="2" name="TextBox 1"/>
-          <p:cNvSpPr txBox="1"/>
-          <p:nvPr/>
-        </p:nvSpPr>
-        <p:spPr>
-          <a:xfrm>
-            <a:off x="457200" y="274320"/>
-            <a:ext cx="11247120" cy="640080"/>
-          </a:xfrm>
-          <a:prstGeom prst="rect">
-            <a:avLst/>
-          </a:prstGeom>
-          <a:noFill/>
-        </p:spPr>
-        <p:txBody>
-          <a:bodyPr wrap="square" anchor="ctr" lIns="45720" rIns="45720">
-            <a:spAutoFit/>
-          </a:bodyPr>
-          <a:lstStyle/>
-          <a:p>
-            <a:pPr algn="l"/>
-            <a:r>
-              <a:rPr sz="2600" b="1">
-                <a:solidFill>
-                  <a:srgbClr val="1E2761"/>
-                </a:solidFill>
-                <a:latin typeface="맑은 고딕"/>
-              </a:rPr>
-              <a:t>서버 프로그램 - 통합 태스크 (ALL_TASK)</a:t>
-            </a:r>
-          </a:p>
-        </p:txBody>
-      </p:sp>
-      <p:sp>
-        <p:nvSpPr>
-          <p:cNvPr id="3" name="Rectangle 2"/>
-          <p:cNvSpPr/>
-          <p:nvPr/>
-        </p:nvSpPr>
-        <p:spPr>
-          <a:xfrm>
-            <a:off x="548640" y="1188720"/>
-            <a:ext cx="7680960" cy="5029200"/>
-          </a:xfrm>
-          <a:prstGeom prst="rect">
-            <a:avLst/>
-          </a:prstGeom>
-          <a:solidFill>
-            <a:srgbClr val="F7F8FA"/>
-          </a:solidFill>
-          <a:ln>
-            <a:solidFill>
-              <a:srgbClr val="C8CEDA"/>
-            </a:solidFill>
-          </a:ln>
-        </p:spPr>
-        <p:style>
-          <a:lnRef idx="1">
-            <a:schemeClr val="accent1"/>
-          </a:lnRef>
-          <a:fillRef idx="3">
-            <a:schemeClr val="accent1"/>
-          </a:fillRef>
-          <a:effectRef idx="2">
-            <a:schemeClr val="accent1"/>
-          </a:effectRef>
-          <a:fontRef idx="minor">
-            <a:schemeClr val="lt1"/>
-          </a:fontRef>
-        </p:style>
-        <p:txBody>
-          <a:bodyPr rtlCol="0" anchor="ctr"/>
-          <a:lstStyle/>
-          <a:p>
-            <a:pPr algn="ctr"/>
-          </a:p>
-        </p:txBody>
-      </p:sp>
-      <p:pic>
-        <p:nvPicPr>
-          <p:cNvPr id="4" name="Picture 3" descr="alltask_ctrl.png"/>
-          <p:cNvPicPr>
-            <a:picLocks noChangeAspect="1"/>
-          </p:cNvPicPr>
-          <p:nvPr/>
-        </p:nvPicPr>
-        <p:blipFill>
-          <a:blip r:embed="rId2"/>
-          <a:stretch>
-            <a:fillRect/>
-          </a:stretch>
-        </p:blipFill>
-        <p:spPr>
-          <a:xfrm>
-            <a:off x="877126" y="1280160"/>
-            <a:ext cx="7023987" cy="4846320"/>
-          </a:xfrm>
-          <a:prstGeom prst="rect">
-            <a:avLst/>
-          </a:prstGeom>
-        </p:spPr>
-      </p:pic>
-      <p:sp>
-        <p:nvSpPr>
-          <p:cNvPr id="5" name="TextBox 4"/>
-          <p:cNvSpPr txBox="1"/>
-          <p:nvPr/>
-        </p:nvSpPr>
-        <p:spPr>
-          <a:xfrm>
-            <a:off x="8503920" y="1188720"/>
-            <a:ext cx="3291840" cy="5029200"/>
-          </a:xfrm>
-          <a:prstGeom prst="rect">
-            <a:avLst/>
-          </a:prstGeom>
-          <a:noFill/>
-        </p:spPr>
-        <p:txBody>
-          <a:bodyPr wrap="square" anchor="t" lIns="45720" rIns="45720">
-            <a:spAutoFit/>
-          </a:bodyPr>
-          <a:lstStyle/>
-          <a:p>
-            <a:pPr algn="l"/>
-            <a:r>
-              <a:rPr sz="1300" b="1">
-                <a:solidFill>
-                  <a:srgbClr val="1E2761"/>
-                </a:solidFill>
-                <a:latin typeface="맑은 고딕"/>
-              </a:rPr>
-              <a:t>■ 메뉴 Path</a:t>
-            </a:r>
-          </a:p>
-          <a:p>
-            <a:pPr algn="l"/>
-            <a:r>
-              <a:rPr sz="1100" b="0">
-                <a:solidFill>
-                  <a:srgbClr val="595959"/>
-                </a:solidFill>
-                <a:latin typeface="맑은 고딕"/>
-              </a:rPr>
-              <a:t>TASK\ALL_TASK\ALL_TASK.exe</a:t>
-            </a:r>
-          </a:p>
-          <a:p>
-            <a:pPr algn="l"/>
-            <a:r>
-              <a:rPr sz="600" b="0">
-                <a:solidFill>
-                  <a:srgbClr val="595959"/>
-                </a:solidFill>
-                <a:latin typeface="맑은 고딕"/>
-              </a:rPr>
-              <a:t/>
-            </a:r>
-          </a:p>
-          <a:p>
-            <a:pPr algn="l"/>
-            <a:r>
-              <a:rPr sz="1300" b="1">
-                <a:solidFill>
-                  <a:srgbClr val="1E2761"/>
-                </a:solidFill>
-                <a:latin typeface="맑은 고딕"/>
-              </a:rPr>
-              <a:t>■ 프로그램 개요</a:t>
-            </a:r>
-          </a:p>
-          <a:p>
-            <a:pPr algn="l"/>
-            <a:r>
-              <a:rPr sz="1100" b="0">
-                <a:solidFill>
-                  <a:srgbClr val="595959"/>
-                </a:solidFill>
-                <a:latin typeface="맑은 고딕"/>
-              </a:rPr>
-              <a:t>설비 통신(EQP)·스케줄러(IO)·상위 통신(HOST) 세 프로그램을 한 창에 합친 것. 탭으로 각 화면을 보고, [제어판] 에서 태스크별로 기동·정지한다.</a:t>
-            </a:r>
-          </a:p>
-          <a:p>
-            <a:pPr algn="l"/>
-            <a:r>
-              <a:rPr sz="600" b="0">
-                <a:solidFill>
-                  <a:srgbClr val="595959"/>
-                </a:solidFill>
-                <a:latin typeface="맑은 고딕"/>
-              </a:rPr>
-              <a:t/>
-            </a:r>
-          </a:p>
-          <a:p>
-            <a:pPr algn="l"/>
-            <a:r>
-              <a:rPr sz="1300" b="1">
-                <a:solidFill>
-                  <a:srgbClr val="1E2761"/>
-                </a:solidFill>
-                <a:latin typeface="맑은 고딕"/>
-              </a:rPr>
-              <a:t>■ 특기사항</a:t>
-            </a:r>
-          </a:p>
-          <a:p>
-            <a:pPr algn="l"/>
-            <a:r>
-              <a:rPr sz="1000" b="0">
-                <a:solidFill>
-                  <a:srgbClr val="595959"/>
-                </a:solidFill>
-                <a:latin typeface="맑은 고딕"/>
-              </a:rPr>
-              <a:t>· 로그는 스레드별 파일(LOG\&lt;스레드&gt;\&lt;스레드&gt;_yyyyMMdd.log, 기본 365일)과 WCS_LOG_PGR 에 남는다.</a:t>
-            </a:r>
-          </a:p>
-        </p:txBody>
-      </p:sp>
-      <p:sp>
-        <p:nvSpPr>
-          <p:cNvPr id="6" name="TextBox 5"/>
-          <p:cNvSpPr txBox="1"/>
-          <p:nvPr/>
-        </p:nvSpPr>
-        <p:spPr>
-          <a:xfrm>
-            <a:off x="457200" y="6446520"/>
-            <a:ext cx="4572000" cy="320040"/>
-          </a:xfrm>
-          <a:prstGeom prst="rect">
-            <a:avLst/>
-          </a:prstGeom>
-          <a:noFill/>
-        </p:spPr>
-        <p:txBody>
-          <a:bodyPr wrap="square" anchor="t" lIns="45720" rIns="45720">
-            <a:spAutoFit/>
-          </a:bodyPr>
-          <a:lstStyle/>
-          <a:p>
-            <a:pPr algn="l"/>
-            <a:r>
-              <a:rPr sz="1000" b="0">
-                <a:solidFill>
-                  <a:srgbClr val="595959"/>
-                </a:solidFill>
-                <a:latin typeface="맑은 고딕"/>
-              </a:rPr>
-              <a:t>LG 화학 1동 ECS  |  화면설계서  |  Ver 1.3</a:t>
-            </a:r>
-          </a:p>
-        </p:txBody>
-      </p:sp>
-      <p:sp>
-        <p:nvSpPr>
-          <p:cNvPr id="7" name="TextBox 6"/>
-          <p:cNvSpPr txBox="1"/>
-          <p:nvPr/>
-        </p:nvSpPr>
-        <p:spPr>
-          <a:xfrm>
-            <a:off x="11155680" y="6446520"/>
-            <a:ext cx="731520" cy="320040"/>
-          </a:xfrm>
-          <a:prstGeom prst="rect">
-            <a:avLst/>
-          </a:prstGeom>
-          <a:noFill/>
-        </p:spPr>
-        <p:txBody>
-          <a:bodyPr wrap="square" anchor="t" lIns="45720" rIns="45720">
-            <a:spAutoFit/>
-          </a:bodyPr>
-          <a:lstStyle/>
-          <a:p>
-            <a:pPr algn="r"/>
-            <a:r>
-              <a:rPr sz="1000" b="0">
-                <a:solidFill>
-                  <a:srgbClr val="595959"/>
-                </a:solidFill>
-                <a:latin typeface="맑은 고딕"/>
-              </a:rPr>
-              <a:t>28</a:t>
-            </a:r>
-          </a:p>
-        </p:txBody>
-      </p:sp>
-    </p:spTree>
-  </p:cSld>
-  <p:clrMapOvr>
-    <a:masterClrMapping/>
-  </p:clrMapOvr>
-</p:sld>
-</file>
-
-<file path=ppt/slides/slide29.xml><?xml version="1.0" encoding="utf-8"?>
-<p:sld xmlns:a="http://schemas.openxmlformats.org/drawingml/2006/main" xmlns:p="http://schemas.openxmlformats.org/presentationml/2006/main" xmlns:r="http://schemas.openxmlformats.org/officeDocument/2006/relationships">
-  <p:cSld>
-    <p:spTree>
-      <p:nvGrpSpPr>
-        <p:cNvPr id="1" name=""/>
-        <p:cNvGrpSpPr/>
-        <p:nvPr/>
-      </p:nvGrpSpPr>
-      <p:grpSpPr/>
-      <p:sp>
-        <p:nvSpPr>
-          <p:cNvPr id="2" name="TextBox 1"/>
-          <p:cNvSpPr txBox="1"/>
-          <p:nvPr/>
-        </p:nvSpPr>
-        <p:spPr>
-          <a:xfrm>
-            <a:off x="457200" y="274320"/>
-            <a:ext cx="11247120" cy="640080"/>
-          </a:xfrm>
-          <a:prstGeom prst="rect">
-            <a:avLst/>
-          </a:prstGeom>
-          <a:noFill/>
-        </p:spPr>
-        <p:txBody>
-          <a:bodyPr wrap="square" anchor="ctr" lIns="45720" rIns="45720">
-            <a:spAutoFit/>
-          </a:bodyPr>
-          <a:lstStyle/>
-          <a:p>
-            <a:pPr algn="l"/>
-            <a:r>
-              <a:rPr sz="2600" b="1">
-                <a:solidFill>
-                  <a:srgbClr val="1E2761"/>
-                </a:solidFill>
-                <a:latin typeface="맑은 고딕"/>
-              </a:rPr>
-              <a:t>서버 프로그램 - 설비 통신 (WCS_TASK_CV)</a:t>
-            </a:r>
-          </a:p>
-        </p:txBody>
-      </p:sp>
-      <p:sp>
-        <p:nvSpPr>
-          <p:cNvPr id="3" name="Rectangle 2"/>
-          <p:cNvSpPr/>
-          <p:nvPr/>
-        </p:nvSpPr>
-        <p:spPr>
-          <a:xfrm>
-            <a:off x="548640" y="1188720"/>
-            <a:ext cx="7680960" cy="5029200"/>
-          </a:xfrm>
-          <a:prstGeom prst="rect">
-            <a:avLst/>
-          </a:prstGeom>
-          <a:solidFill>
-            <a:srgbClr val="F7F8FA"/>
-          </a:solidFill>
-          <a:ln>
-            <a:solidFill>
-              <a:srgbClr val="C8CEDA"/>
-            </a:solidFill>
-          </a:ln>
-        </p:spPr>
-        <p:style>
-          <a:lnRef idx="1">
-            <a:schemeClr val="accent1"/>
-          </a:lnRef>
-          <a:fillRef idx="3">
-            <a:schemeClr val="accent1"/>
-          </a:fillRef>
-          <a:effectRef idx="2">
-            <a:schemeClr val="accent1"/>
-          </a:effectRef>
-          <a:fontRef idx="minor">
-            <a:schemeClr val="lt1"/>
-          </a:fontRef>
-        </p:style>
-        <p:txBody>
-          <a:bodyPr rtlCol="0" anchor="ctr"/>
-          <a:lstStyle/>
-          <a:p>
-            <a:pPr algn="ctr"/>
-          </a:p>
-        </p:txBody>
-      </p:sp>
-      <p:pic>
-        <p:nvPicPr>
-          <p:cNvPr id="4" name="Picture 3" descr="cvtask_main.png"/>
-          <p:cNvPicPr>
-            <a:picLocks noChangeAspect="1"/>
-          </p:cNvPicPr>
-          <p:nvPr/>
-        </p:nvPicPr>
-        <p:blipFill>
-          <a:blip r:embed="rId2"/>
-          <a:stretch>
-            <a:fillRect/>
-          </a:stretch>
-        </p:blipFill>
-        <p:spPr>
-          <a:xfrm>
-            <a:off x="877126" y="1280160"/>
-            <a:ext cx="7023987" cy="4846320"/>
-          </a:xfrm>
-          <a:prstGeom prst="rect">
-            <a:avLst/>
-          </a:prstGeom>
-        </p:spPr>
-      </p:pic>
-      <p:sp>
-        <p:nvSpPr>
-          <p:cNvPr id="5" name="TextBox 4"/>
-          <p:cNvSpPr txBox="1"/>
-          <p:nvPr/>
-        </p:nvSpPr>
-        <p:spPr>
-          <a:xfrm>
-            <a:off x="8503920" y="1188720"/>
-            <a:ext cx="3291840" cy="5029200"/>
-          </a:xfrm>
-          <a:prstGeom prst="rect">
-            <a:avLst/>
-          </a:prstGeom>
-          <a:noFill/>
-        </p:spPr>
-        <p:txBody>
-          <a:bodyPr wrap="square" anchor="t" lIns="45720" rIns="45720">
-            <a:spAutoFit/>
-          </a:bodyPr>
-          <a:lstStyle/>
-          <a:p>
-            <a:pPr algn="l"/>
-            <a:r>
-              <a:rPr sz="1300" b="1">
-                <a:solidFill>
-                  <a:srgbClr val="1E2761"/>
-                </a:solidFill>
-                <a:latin typeface="맑은 고딕"/>
-              </a:rPr>
-              <a:t>■ 메뉴 Path</a:t>
-            </a:r>
-          </a:p>
-          <a:p>
-            <a:pPr algn="l"/>
-            <a:r>
-              <a:rPr sz="1100" b="0">
-                <a:solidFill>
-                  <a:srgbClr val="595959"/>
-                </a:solidFill>
-                <a:latin typeface="맑은 고딕"/>
-              </a:rPr>
-              <a:t>ALL_TASK ▷ EQP 탭 (단독 : TASK\WCS_TASK_CV_BIN\bin\Debug\WCS_TASK_CV.exe)</a:t>
-            </a:r>
-          </a:p>
-          <a:p>
-            <a:pPr algn="l"/>
-            <a:r>
-              <a:rPr sz="600" b="0">
-                <a:solidFill>
-                  <a:srgbClr val="595959"/>
-                </a:solidFill>
-                <a:latin typeface="맑은 고딕"/>
-              </a:rPr>
-              <a:t/>
-            </a:r>
-          </a:p>
-          <a:p>
-            <a:pPr algn="l"/>
-            <a:r>
-              <a:rPr sz="1300" b="1">
-                <a:solidFill>
-                  <a:srgbClr val="1E2761"/>
-                </a:solidFill>
-                <a:latin typeface="맑은 고딕"/>
-              </a:rPr>
-              <a:t>■ 프로그램 개요</a:t>
-            </a:r>
-          </a:p>
-          <a:p>
-            <a:pPr algn="l"/>
-            <a:r>
-              <a:rPr sz="1100" b="0">
-                <a:solidFill>
-                  <a:srgbClr val="595959"/>
-                </a:solidFill>
-                <a:latin typeface="맑은 고딕"/>
-              </a:rPr>
-              <a:t>마스터 PLC(XGT) 와 1소켓으로 통신하며 CV_DATA/SC_DATA_LGLS/RTV_DATA_LGLS 를 갱신하고 지시를 PLC 에 쓴다.</a:t>
-            </a:r>
-          </a:p>
-          <a:p>
-            <a:pPr algn="l"/>
-            <a:r>
-              <a:rPr sz="600" b="0">
-                <a:solidFill>
-                  <a:srgbClr val="595959"/>
-                </a:solidFill>
-                <a:latin typeface="맑은 고딕"/>
-              </a:rPr>
-              <a:t/>
-            </a:r>
-          </a:p>
-          <a:p>
-            <a:pPr algn="l"/>
-            <a:r>
-              <a:rPr sz="1300" b="1">
-                <a:solidFill>
-                  <a:srgbClr val="1E2761"/>
-                </a:solidFill>
-                <a:latin typeface="맑은 고딕"/>
-              </a:rPr>
-              <a:t>■ 특기사항</a:t>
-            </a:r>
-          </a:p>
-          <a:p>
-            <a:pPr algn="l"/>
-            <a:r>
-              <a:rPr sz="1000" b="0">
-                <a:solidFill>
-                  <a:srgbClr val="595959"/>
-                </a:solidFill>
-                <a:latin typeface="맑은 고딕"/>
-              </a:rPr>
-              <a:t>· C/V 15대 한 바퀴 약 1초(2026-09-17 개선, 종전 3초 이상) - 운전 화면 반영 속도를 좌우한다.</a:t>
-            </a:r>
-          </a:p>
-          <a:p>
-            <a:pPr algn="l"/>
-            <a:r>
-              <a:rPr sz="1000" b="0">
-                <a:solidFill>
-                  <a:srgbClr val="595959"/>
-                </a:solidFill>
-                <a:latin typeface="맑은 고딕"/>
-              </a:rPr>
-              <a:t>· WCS_DB.INI [CNF] 속도 옵션(저장 후 2초 내 반영) : CV_BULK_R / CV_EVT_BULK / CV_HB_MS / CV_CYCLE_SLEEP_MS / CV_CYCLE_LOG_MS / UI_LOG_ASYNC.</a:t>
-            </a:r>
-          </a:p>
-          <a:p>
-            <a:pPr algn="l"/>
-            <a:r>
-              <a:rPr sz="1000" b="0">
-                <a:solidFill>
-                  <a:srgbClr val="595959"/>
-                </a:solidFill>
-                <a:latin typeface="맑은 고딕"/>
-              </a:rPr>
-              <a:t>· Client [입고/출고 모드] 더블클릭 전환(DIRM)은 화물 보류 없이 즉시 방향 워드에 쓴다.</a:t>
-            </a:r>
-          </a:p>
-        </p:txBody>
-      </p:sp>
-      <p:sp>
-        <p:nvSpPr>
-          <p:cNvPr id="6" name="TextBox 5"/>
-          <p:cNvSpPr txBox="1"/>
-          <p:nvPr/>
-        </p:nvSpPr>
-        <p:spPr>
-          <a:xfrm>
-            <a:off x="457200" y="6446520"/>
-            <a:ext cx="4572000" cy="320040"/>
-          </a:xfrm>
-          <a:prstGeom prst="rect">
-            <a:avLst/>
-          </a:prstGeom>
-          <a:noFill/>
-        </p:spPr>
-        <p:txBody>
-          <a:bodyPr wrap="square" anchor="t" lIns="45720" rIns="45720">
-            <a:spAutoFit/>
-          </a:bodyPr>
-          <a:lstStyle/>
-          <a:p>
-            <a:pPr algn="l"/>
-            <a:r>
-              <a:rPr sz="1000" b="0">
-                <a:solidFill>
-                  <a:srgbClr val="595959"/>
-                </a:solidFill>
-                <a:latin typeface="맑은 고딕"/>
-              </a:rPr>
-              <a:t>LG 화학 1동 ECS  |  화면설계서  |  Ver 1.3</a:t>
-            </a:r>
-          </a:p>
-        </p:txBody>
-      </p:sp>
-      <p:sp>
-        <p:nvSpPr>
-          <p:cNvPr id="7" name="TextBox 6"/>
-          <p:cNvSpPr txBox="1"/>
-          <p:nvPr/>
-        </p:nvSpPr>
-        <p:spPr>
-          <a:xfrm>
-            <a:off x="11155680" y="6446520"/>
-            <a:ext cx="731520" cy="320040"/>
-          </a:xfrm>
-          <a:prstGeom prst="rect">
-            <a:avLst/>
-          </a:prstGeom>
-          <a:noFill/>
-        </p:spPr>
-        <p:txBody>
-          <a:bodyPr wrap="square" anchor="t" lIns="45720" rIns="45720">
-            <a:spAutoFit/>
-          </a:bodyPr>
-          <a:lstStyle/>
-          <a:p>
-            <a:pPr algn="r"/>
-            <a:r>
-              <a:rPr sz="1000" b="0">
-                <a:solidFill>
-                  <a:srgbClr val="595959"/>
-                </a:solidFill>
-                <a:latin typeface="맑은 고딕"/>
-              </a:rPr>
-              <a:t>29</a:t>
-            </a:r>
-          </a:p>
-        </p:txBody>
-      </p:sp>
-    </p:spTree>
-  </p:cSld>
-  <p:clrMapOvr>
-    <a:masterClrMapping/>
-  </p:clrMapOvr>
-</p:sld>
-</file>
-
-<file path=ppt/slides/slide3.xml><?xml version="1.0" encoding="utf-8"?>
-<p:sld xmlns:a="http://schemas.openxmlformats.org/drawingml/2006/main" xmlns:p="http://schemas.openxmlformats.org/presentationml/2006/main" xmlns:r="http://schemas.openxmlformats.org/officeDocument/2006/relationships">
-  <p:cSld>
-    <p:spTree>
-      <p:nvGrpSpPr>
-        <p:cNvPr id="1" name=""/>
-        <p:cNvGrpSpPr/>
-        <p:nvPr/>
-      </p:nvGrpSpPr>
-      <p:grpSpPr/>
-      <p:sp>
-        <p:nvSpPr>
-          <p:cNvPr id="2" name="TextBox 1"/>
-          <p:cNvSpPr txBox="1"/>
-          <p:nvPr/>
-        </p:nvSpPr>
-        <p:spPr>
-          <a:xfrm>
-            <a:off x="457200" y="274320"/>
-            <a:ext cx="11247120" cy="640080"/>
-          </a:xfrm>
-          <a:prstGeom prst="rect">
-            <a:avLst/>
-          </a:prstGeom>
-          <a:noFill/>
-        </p:spPr>
-        <p:txBody>
-          <a:bodyPr wrap="square" anchor="ctr" lIns="45720" rIns="45720">
-            <a:spAutoFit/>
-          </a:bodyPr>
-          <a:lstStyle/>
-          <a:p>
-            <a:pPr algn="l"/>
-            <a:r>
-              <a:rPr sz="2600" b="1">
-                <a:solidFill>
-                  <a:srgbClr val="1E2761"/>
-                </a:solidFill>
-                <a:latin typeface="맑은 고딕"/>
-              </a:rPr>
-              <a:t>Contents</a:t>
-            </a:r>
-          </a:p>
-        </p:txBody>
-      </p:sp>
-      <p:sp>
-        <p:nvSpPr>
-          <p:cNvPr id="3" name="TextBox 2"/>
-          <p:cNvSpPr txBox="1"/>
-          <p:nvPr/>
-        </p:nvSpPr>
-        <p:spPr>
-          <a:xfrm>
-            <a:off x="548640" y="1097280"/>
-            <a:ext cx="3657600" cy="5212080"/>
-          </a:xfrm>
-          <a:prstGeom prst="rect">
-            <a:avLst/>
-          </a:prstGeom>
-          <a:noFill/>
-        </p:spPr>
-        <p:txBody>
-          <a:bodyPr wrap="square" anchor="t" lIns="45720" rIns="45720">
-            <a:spAutoFit/>
-          </a:bodyPr>
-          <a:lstStyle/>
-          <a:p>
-            <a:pPr algn="l"/>
-            <a:r>
-              <a:rPr sz="1400" b="1">
-                <a:solidFill>
-                  <a:srgbClr val="1E2761"/>
-                </a:solidFill>
-                <a:latin typeface="맑은 고딕"/>
-              </a:rPr>
-              <a:t>메인</a:t>
-            </a:r>
-          </a:p>
-          <a:p>
-            <a:pPr algn="l"/>
-            <a:r>
-              <a:rPr sz="1100" b="0">
-                <a:solidFill>
-                  <a:srgbClr val="595959"/>
-                </a:solidFill>
-                <a:latin typeface="맑은 고딕"/>
-              </a:rPr>
-              <a:t>   메인 화면 (전체화면)</a:t>
-            </a:r>
-          </a:p>
-          <a:p>
-            <a:pPr algn="l"/>
-            <a:r>
-              <a:rPr sz="1100" b="0">
-                <a:solidFill>
-                  <a:srgbClr val="595959"/>
-                </a:solidFill>
-                <a:latin typeface="맑은 고딕"/>
-              </a:rPr>
-              <a:t>   메인 화면 영역 구성</a:t>
-            </a:r>
-          </a:p>
-          <a:p>
-            <a:pPr algn="l"/>
-            <a:r>
-              <a:rPr sz="1100" b="0">
-                <a:solidFill>
-                  <a:srgbClr val="595959"/>
-                </a:solidFill>
-                <a:latin typeface="맑은 고딕"/>
-              </a:rPr>
-              <a:t>   리본 메뉴</a:t>
-            </a:r>
-          </a:p>
-          <a:p>
-            <a:pPr algn="l"/>
-            <a:r>
-              <a:rPr sz="1100" b="0">
-                <a:solidFill>
-                  <a:srgbClr val="595959"/>
-                </a:solidFill>
-                <a:latin typeface="맑은 고딕"/>
-              </a:rPr>
-              <a:t>   왼쪽 고정 칸 ① 통신 상태 · 범례</a:t>
-            </a:r>
-          </a:p>
-          <a:p>
-            <a:pPr algn="l"/>
-            <a:r>
-              <a:rPr sz="1100" b="0">
-                <a:solidFill>
-                  <a:srgbClr val="595959"/>
-                </a:solidFill>
-                <a:latin typeface="맑은 고딕"/>
-              </a:rPr>
-              <a:t>   왼쪽 고정 칸 ② 설비 반송 · 작업정보</a:t>
-            </a:r>
-          </a:p>
-          <a:p>
-            <a:pPr algn="l"/>
-            <a:r>
-              <a:rPr sz="1100" b="0">
-                <a:solidFill>
-                  <a:srgbClr val="595959"/>
-                </a:solidFill>
-                <a:latin typeface="맑은 고딕"/>
-              </a:rPr>
-              <a:t>   설비 그림 · 마우스 동작</a:t>
-            </a:r>
-          </a:p>
-          <a:p>
-            <a:pPr algn="l"/>
-            <a:r>
-              <a:rPr sz="600" b="0">
-                <a:solidFill>
-                  <a:srgbClr val="595959"/>
-                </a:solidFill>
-                <a:latin typeface="맑은 고딕"/>
-              </a:rPr>
-              <a:t/>
-            </a:r>
-          </a:p>
-          <a:p>
-            <a:pPr algn="l"/>
-            <a:r>
-              <a:rPr sz="1400" b="1">
-                <a:solidFill>
-                  <a:srgbClr val="1E2761"/>
-                </a:solidFill>
-                <a:latin typeface="맑은 고딕"/>
-              </a:rPr>
-              <a:t>설비 대화상자</a:t>
-            </a:r>
-          </a:p>
-          <a:p>
-            <a:pPr algn="l"/>
-            <a:r>
-              <a:rPr sz="1100" b="0">
-                <a:solidFill>
-                  <a:srgbClr val="595959"/>
-                </a:solidFill>
-                <a:latin typeface="맑은 고딕"/>
-              </a:rPr>
-              <a:t>   CV 상태</a:t>
-            </a:r>
-          </a:p>
-          <a:p>
-            <a:pPr algn="l"/>
-            <a:r>
-              <a:rPr sz="1100" b="0">
-                <a:solidFill>
-                  <a:srgbClr val="595959"/>
-                </a:solidFill>
-                <a:latin typeface="맑은 고딕"/>
-              </a:rPr>
-              <a:t>   SC 상태</a:t>
-            </a:r>
-          </a:p>
-          <a:p>
-            <a:pPr algn="l"/>
-            <a:r>
-              <a:rPr sz="1100" b="0">
-                <a:solidFill>
-                  <a:srgbClr val="595959"/>
-                </a:solidFill>
-                <a:latin typeface="맑은 고딕"/>
-              </a:rPr>
-              <a:t>   RTV(RGV) 상태</a:t>
-            </a:r>
-          </a:p>
-          <a:p>
-            <a:pPr algn="l"/>
-            <a:r>
-              <a:rPr sz="600" b="0">
-                <a:solidFill>
-                  <a:srgbClr val="595959"/>
-                </a:solidFill>
-                <a:latin typeface="맑은 고딕"/>
-              </a:rPr>
-              <a:t/>
-            </a:r>
-          </a:p>
-          <a:p>
-            <a:pPr algn="l"/>
-            <a:r>
-              <a:rPr sz="1400" b="1">
-                <a:solidFill>
-                  <a:srgbClr val="1E2761"/>
-                </a:solidFill>
-                <a:latin typeface="맑은 고딕"/>
-              </a:rPr>
-              <a:t>부록</a:t>
-            </a:r>
-          </a:p>
-          <a:p>
-            <a:pPr algn="l"/>
-            <a:r>
-              <a:rPr sz="1100" b="0">
-                <a:solidFill>
-                  <a:srgbClr val="595959"/>
-                </a:solidFill>
-                <a:latin typeface="맑은 고딕"/>
-              </a:rPr>
-              <a:t>   Ecs.ini 화면 설정</a:t>
-            </a:r>
-          </a:p>
-          <a:p>
-            <a:pPr algn="l"/>
-            <a:r>
-              <a:rPr sz="1100" b="0">
-                <a:solidFill>
-                  <a:srgbClr val="595959"/>
-                </a:solidFill>
-                <a:latin typeface="맑은 고딕"/>
-              </a:rPr>
-              <a:t>   설계 결정 · 변경 이력</a:t>
-            </a:r>
-          </a:p>
-          <a:p>
-            <a:pPr algn="l"/>
-            <a:r>
-              <a:rPr sz="600" b="0">
-                <a:solidFill>
-                  <a:srgbClr val="595959"/>
-                </a:solidFill>
-                <a:latin typeface="맑은 고딕"/>
-              </a:rPr>
-              <a:t/>
-            </a:r>
-          </a:p>
-        </p:txBody>
-      </p:sp>
-      <p:sp>
-        <p:nvSpPr>
-          <p:cNvPr id="4" name="TextBox 3"/>
-          <p:cNvSpPr txBox="1"/>
-          <p:nvPr/>
-        </p:nvSpPr>
-        <p:spPr>
-          <a:xfrm>
-            <a:off x="4343400" y="1097280"/>
-            <a:ext cx="3657600" cy="5212080"/>
-          </a:xfrm>
-          <a:prstGeom prst="rect">
-            <a:avLst/>
-          </a:prstGeom>
-          <a:noFill/>
-        </p:spPr>
-        <p:txBody>
-          <a:bodyPr wrap="square" anchor="t" lIns="45720" rIns="45720">
-            <a:spAutoFit/>
-          </a:bodyPr>
-          <a:lstStyle/>
-          <a:p>
-            <a:pPr algn="l"/>
-            <a:r>
-              <a:rPr sz="1400" b="1">
-                <a:solidFill>
-                  <a:srgbClr val="1E2761"/>
-                </a:solidFill>
-                <a:latin typeface="맑은 고딕"/>
-              </a:rPr>
-              <a:t>ECS&gt;환경설정</a:t>
-            </a:r>
-          </a:p>
-          <a:p>
-            <a:pPr algn="l"/>
-            <a:r>
-              <a:rPr sz="1100" b="0">
-                <a:solidFill>
-                  <a:srgbClr val="595959"/>
-                </a:solidFill>
-                <a:latin typeface="맑은 고딕"/>
-              </a:rPr>
-              <a:t>   통신 연결 정의 (EQP 정보)</a:t>
-            </a:r>
-          </a:p>
-          <a:p>
-            <a:pPr algn="l"/>
-            <a:r>
-              <a:rPr sz="1100" b="0">
-                <a:solidFill>
-                  <a:srgbClr val="595959"/>
-                </a:solidFill>
-                <a:latin typeface="맑은 고딕"/>
-              </a:rPr>
-              <a:t>   로그 삭제 설정 (이력 삭제 주기 변경)</a:t>
-            </a:r>
-          </a:p>
-          <a:p>
-            <a:pPr algn="l"/>
-            <a:r>
-              <a:rPr sz="1100" b="0">
-                <a:solidFill>
-                  <a:srgbClr val="595959"/>
-                </a:solidFill>
-                <a:latin typeface="맑은 고딕"/>
-              </a:rPr>
-              <a:t>   범례 (색상정보)</a:t>
-            </a:r>
-          </a:p>
-          <a:p>
-            <a:pPr algn="l"/>
-            <a:r>
-              <a:rPr sz="600" b="0">
-                <a:solidFill>
-                  <a:srgbClr val="595959"/>
-                </a:solidFill>
-                <a:latin typeface="맑은 고딕"/>
-              </a:rPr>
-              <a:t/>
-            </a:r>
-          </a:p>
-          <a:p>
-            <a:pPr algn="l"/>
-            <a:r>
-              <a:rPr sz="1400" b="1">
-                <a:solidFill>
-                  <a:srgbClr val="1E2761"/>
-                </a:solidFill>
-                <a:latin typeface="맑은 고딕"/>
-              </a:rPr>
-              <a:t>MANUAL</a:t>
-            </a:r>
-          </a:p>
-          <a:p>
-            <a:pPr algn="l"/>
-            <a:r>
-              <a:rPr sz="1100" b="0">
-                <a:solidFill>
-                  <a:srgbClr val="595959"/>
-                </a:solidFill>
-                <a:latin typeface="맑은 고딕"/>
-              </a:rPr>
-              <a:t>   JOB 수동지시</a:t>
-            </a:r>
-          </a:p>
-          <a:p>
-            <a:pPr algn="l"/>
-            <a:r>
-              <a:rPr sz="1100" b="0">
-                <a:solidFill>
-                  <a:srgbClr val="595959"/>
-                </a:solidFill>
-                <a:latin typeface="맑은 고딕"/>
-              </a:rPr>
-              <a:t>   크레인 수동작업</a:t>
-            </a:r>
-          </a:p>
-          <a:p>
-            <a:pPr algn="l"/>
-            <a:r>
-              <a:rPr sz="1100" b="0">
-                <a:solidFill>
-                  <a:srgbClr val="595959"/>
-                </a:solidFill>
-                <a:latin typeface="맑은 고딕"/>
-              </a:rPr>
-              <a:t>   RTV(RGV) 수동작업</a:t>
-            </a:r>
-          </a:p>
-          <a:p>
-            <a:pPr algn="l"/>
-            <a:r>
-              <a:rPr sz="600" b="0">
-                <a:solidFill>
-                  <a:srgbClr val="595959"/>
-                </a:solidFill>
-                <a:latin typeface="맑은 고딕"/>
-              </a:rPr>
-              <a:t/>
-            </a:r>
-          </a:p>
-          <a:p>
-            <a:pPr algn="l"/>
-            <a:r>
-              <a:rPr sz="1400" b="1">
-                <a:solidFill>
-                  <a:srgbClr val="1E2761"/>
-                </a:solidFill>
-                <a:latin typeface="맑은 고딕"/>
-              </a:rPr>
-              <a:t>서버 프로그램</a:t>
-            </a:r>
-          </a:p>
-          <a:p>
-            <a:pPr algn="l"/>
-            <a:r>
-              <a:rPr sz="1100" b="0">
-                <a:solidFill>
-                  <a:srgbClr val="595959"/>
-                </a:solidFill>
-                <a:latin typeface="맑은 고딕"/>
-              </a:rPr>
-              <a:t>   통합 태스크 (ALL_TASK)</a:t>
-            </a:r>
-          </a:p>
-          <a:p>
-            <a:pPr algn="l"/>
-            <a:r>
-              <a:rPr sz="1100" b="0">
-                <a:solidFill>
-                  <a:srgbClr val="595959"/>
-                </a:solidFill>
-                <a:latin typeface="맑은 고딕"/>
-              </a:rPr>
-              <a:t>   설비 통신 (WCS_TASK_CV)</a:t>
-            </a:r>
-          </a:p>
-          <a:p>
-            <a:pPr algn="l"/>
-            <a:r>
-              <a:rPr sz="1100" b="0">
-                <a:solidFill>
-                  <a:srgbClr val="595959"/>
-                </a:solidFill>
-                <a:latin typeface="맑은 고딕"/>
-              </a:rPr>
-              <a:t>   스케줄러 (IO_TASK)</a:t>
-            </a:r>
-          </a:p>
-          <a:p>
-            <a:pPr algn="l"/>
-            <a:r>
-              <a:rPr sz="1100" b="0">
-                <a:solidFill>
-                  <a:srgbClr val="595959"/>
-                </a:solidFill>
-                <a:latin typeface="맑은 고딕"/>
-              </a:rPr>
-              <a:t>   상위 통신 (WCS_TASK_HOST)</a:t>
-            </a:r>
-          </a:p>
-          <a:p>
-            <a:pPr algn="l"/>
-            <a:r>
-              <a:rPr sz="600" b="0">
-                <a:solidFill>
-                  <a:srgbClr val="595959"/>
-                </a:solidFill>
-                <a:latin typeface="맑은 고딕"/>
-              </a:rPr>
-              <a:t/>
-            </a:r>
-          </a:p>
-        </p:txBody>
-      </p:sp>
-      <p:sp>
-        <p:nvSpPr>
-          <p:cNvPr id="5" name="TextBox 4"/>
-          <p:cNvSpPr txBox="1"/>
-          <p:nvPr/>
-        </p:nvSpPr>
-        <p:spPr>
-          <a:xfrm>
-            <a:off x="8138160" y="1097280"/>
-            <a:ext cx="3657600" cy="5212080"/>
-          </a:xfrm>
-          <a:prstGeom prst="rect">
-            <a:avLst/>
-          </a:prstGeom>
-          <a:noFill/>
-        </p:spPr>
-        <p:txBody>
-          <a:bodyPr wrap="square" anchor="t" lIns="45720" rIns="45720">
-            <a:spAutoFit/>
-          </a:bodyPr>
-          <a:lstStyle/>
-          <a:p>
-            <a:pPr algn="l"/>
-            <a:r>
-              <a:rPr sz="1400" b="1">
-                <a:solidFill>
-                  <a:srgbClr val="1E2761"/>
-                </a:solidFill>
-                <a:latin typeface="맑은 고딕"/>
-              </a:rPr>
-              <a:t>ECS&gt;뷰</a:t>
-            </a:r>
-          </a:p>
-          <a:p>
-            <a:pPr algn="l"/>
-            <a:r>
-              <a:rPr sz="1100" b="0">
-                <a:solidFill>
-                  <a:srgbClr val="595959"/>
-                </a:solidFill>
-                <a:latin typeface="맑은 고딕"/>
-              </a:rPr>
-              <a:t>   작업정보</a:t>
-            </a:r>
-          </a:p>
-          <a:p>
-            <a:pPr algn="l"/>
-            <a:r>
-              <a:rPr sz="1100" b="0">
-                <a:solidFill>
-                  <a:srgbClr val="595959"/>
-                </a:solidFill>
-                <a:latin typeface="맑은 고딕"/>
-              </a:rPr>
-              <a:t>   찾기</a:t>
-            </a:r>
-          </a:p>
-          <a:p>
-            <a:pPr algn="l"/>
-            <a:r>
-              <a:rPr sz="600" b="0">
-                <a:solidFill>
-                  <a:srgbClr val="595959"/>
-                </a:solidFill>
-                <a:latin typeface="맑은 고딕"/>
-              </a:rPr>
-              <a:t/>
-            </a:r>
-          </a:p>
-          <a:p>
-            <a:pPr algn="l"/>
-            <a:r>
-              <a:rPr sz="1400" b="1">
-                <a:solidFill>
-                  <a:srgbClr val="1E2761"/>
-                </a:solidFill>
-                <a:latin typeface="맑은 고딕"/>
-              </a:rPr>
-              <a:t>ECS&gt;창고 모니터링</a:t>
-            </a:r>
-          </a:p>
-          <a:p>
-            <a:pPr algn="l"/>
-            <a:r>
-              <a:rPr sz="1100" b="0">
-                <a:solidFill>
-                  <a:srgbClr val="595959"/>
-                </a:solidFill>
-                <a:latin typeface="맑은 고딕"/>
-              </a:rPr>
-              <a:t>   작업번호 / 트랙번호 / 적재용기 표시 전환</a:t>
-            </a:r>
-          </a:p>
-          <a:p>
-            <a:pPr algn="l"/>
-            <a:r>
-              <a:rPr sz="600" b="0">
-                <a:solidFill>
-                  <a:srgbClr val="595959"/>
-                </a:solidFill>
-                <a:latin typeface="맑은 고딕"/>
-              </a:rPr>
-              <a:t/>
-            </a:r>
-          </a:p>
-          <a:p>
-            <a:pPr algn="l"/>
-            <a:r>
-              <a:rPr sz="1400" b="1">
-                <a:solidFill>
-                  <a:srgbClr val="1E2761"/>
-                </a:solidFill>
-                <a:latin typeface="맑은 고딕"/>
-              </a:rPr>
-              <a:t>LOG</a:t>
-            </a:r>
-          </a:p>
-          <a:p>
-            <a:pPr algn="l"/>
-            <a:r>
-              <a:rPr sz="1100" b="0">
-                <a:solidFill>
-                  <a:srgbClr val="595959"/>
-                </a:solidFill>
-                <a:latin typeface="맑은 고딕"/>
-              </a:rPr>
-              <a:t>   작업 로그</a:t>
-            </a:r>
-          </a:p>
-          <a:p>
-            <a:pPr algn="l"/>
-            <a:r>
-              <a:rPr sz="1100" b="0">
-                <a:solidFill>
-                  <a:srgbClr val="595959"/>
-                </a:solidFill>
-                <a:latin typeface="맑은 고딕"/>
-              </a:rPr>
-              <a:t>   HOST 로그</a:t>
-            </a:r>
-          </a:p>
-          <a:p>
-            <a:pPr algn="l"/>
-            <a:r>
-              <a:rPr sz="1100" b="0">
-                <a:solidFill>
-                  <a:srgbClr val="595959"/>
-                </a:solidFill>
-                <a:latin typeface="맑은 고딕"/>
-              </a:rPr>
-              <a:t>   설비에러이력</a:t>
-            </a:r>
-          </a:p>
-          <a:p>
-            <a:pPr algn="l"/>
-            <a:r>
-              <a:rPr sz="1100" b="0">
-                <a:solidFill>
-                  <a:srgbClr val="595959"/>
-                </a:solidFill>
-                <a:latin typeface="맑은 고딕"/>
-              </a:rPr>
-              <a:t>   유저사용 로그</a:t>
-            </a:r>
-          </a:p>
-          <a:p>
-            <a:pPr algn="l"/>
-            <a:r>
-              <a:rPr sz="1100" b="0">
-                <a:solidFill>
-                  <a:srgbClr val="595959"/>
-                </a:solidFill>
-                <a:latin typeface="맑은 고딕"/>
-              </a:rPr>
-              <a:t>   ECS 프로그램 이력</a:t>
-            </a:r>
-          </a:p>
-          <a:p>
-            <a:pPr algn="l"/>
-            <a:r>
-              <a:rPr sz="1100" b="0">
-                <a:solidFill>
-                  <a:srgbClr val="595959"/>
-                </a:solidFill>
-                <a:latin typeface="맑은 고딕"/>
-              </a:rPr>
-              <a:t>   알람 (경고창)</a:t>
-            </a:r>
-          </a:p>
-          <a:p>
-            <a:pPr algn="l"/>
-            <a:r>
-              <a:rPr sz="600" b="0">
-                <a:solidFill>
-                  <a:srgbClr val="595959"/>
-                </a:solidFill>
-                <a:latin typeface="맑은 고딕"/>
-              </a:rPr>
-              <a:t/>
-            </a:r>
-          </a:p>
-        </p:txBody>
-      </p:sp>
-      <p:sp>
-        <p:nvSpPr>
-          <p:cNvPr id="6" name="TextBox 5"/>
-          <p:cNvSpPr txBox="1"/>
-          <p:nvPr/>
-        </p:nvSpPr>
-        <p:spPr>
-          <a:xfrm>
-            <a:off x="457200" y="6446520"/>
-            <a:ext cx="4572000" cy="320040"/>
-          </a:xfrm>
-          <a:prstGeom prst="rect">
-            <a:avLst/>
-          </a:prstGeom>
-          <a:noFill/>
-        </p:spPr>
-        <p:txBody>
-          <a:bodyPr wrap="square" anchor="t" lIns="45720" rIns="45720">
-            <a:spAutoFit/>
-          </a:bodyPr>
-          <a:lstStyle/>
-          <a:p>
-            <a:pPr algn="l"/>
-            <a:r>
-              <a:rPr sz="1000" b="0">
-                <a:solidFill>
-                  <a:srgbClr val="595959"/>
-                </a:solidFill>
-                <a:latin typeface="맑은 고딕"/>
-              </a:rPr>
-              <a:t>LG 화학 1동 ECS  |  화면설계서  |  Ver 1.3</a:t>
-            </a:r>
-          </a:p>
-        </p:txBody>
-      </p:sp>
-      <p:sp>
-        <p:nvSpPr>
-          <p:cNvPr id="7" name="TextBox 6"/>
-          <p:cNvSpPr txBox="1"/>
-          <p:nvPr/>
-        </p:nvSpPr>
-        <p:spPr>
-          <a:xfrm>
-            <a:off x="11155680" y="6446520"/>
-            <a:ext cx="731520" cy="320040"/>
-          </a:xfrm>
-          <a:prstGeom prst="rect">
-            <a:avLst/>
-          </a:prstGeom>
-          <a:noFill/>
-        </p:spPr>
-        <p:txBody>
-          <a:bodyPr wrap="square" anchor="t" lIns="45720" rIns="45720">
-            <a:spAutoFit/>
-          </a:bodyPr>
-          <a:lstStyle/>
-          <a:p>
-            <a:pPr algn="r"/>
-            <a:r>
-              <a:rPr sz="1000" b="0">
-                <a:solidFill>
-                  <a:srgbClr val="595959"/>
-                </a:solidFill>
-                <a:latin typeface="맑은 고딕"/>
-              </a:rPr>
-              <a:t>3</a:t>
-            </a:r>
-          </a:p>
-        </p:txBody>
-      </p:sp>
-    </p:spTree>
-  </p:cSld>
-  <p:clrMapOvr>
-    <a:masterClrMapping/>
-  </p:clrMapOvr>
-</p:sld>
-</file>
-
-<file path=ppt/slides/slide30.xml><?xml version="1.0" encoding="utf-8"?>
-<p:sld xmlns:a="http://schemas.openxmlformats.org/drawingml/2006/main" xmlns:p="http://schemas.openxmlformats.org/presentationml/2006/main" xmlns:r="http://schemas.openxmlformats.org/officeDocument/2006/relationships">
-  <p:cSld>
-    <p:spTree>
-      <p:nvGrpSpPr>
-        <p:cNvPr id="1" name=""/>
-        <p:cNvGrpSpPr/>
-        <p:nvPr/>
-      </p:nvGrpSpPr>
-      <p:grpSpPr/>
-      <p:sp>
-        <p:nvSpPr>
-          <p:cNvPr id="2" name="TextBox 1"/>
-          <p:cNvSpPr txBox="1"/>
-          <p:nvPr/>
-        </p:nvSpPr>
-        <p:spPr>
-          <a:xfrm>
-            <a:off x="457200" y="274320"/>
-            <a:ext cx="11247120" cy="640080"/>
-          </a:xfrm>
-          <a:prstGeom prst="rect">
-            <a:avLst/>
-          </a:prstGeom>
-          <a:noFill/>
-        </p:spPr>
-        <p:txBody>
-          <a:bodyPr wrap="square" anchor="ctr" lIns="45720" rIns="45720">
-            <a:spAutoFit/>
-          </a:bodyPr>
-          <a:lstStyle/>
-          <a:p>
-            <a:pPr algn="l"/>
-            <a:r>
-              <a:rPr sz="2600" b="1">
-                <a:solidFill>
-                  <a:srgbClr val="1E2761"/>
-                </a:solidFill>
-                <a:latin typeface="맑은 고딕"/>
-              </a:rPr>
-              <a:t>서버 프로그램 - 스케줄러 (IO_TASK)</a:t>
-            </a:r>
-          </a:p>
-        </p:txBody>
-      </p:sp>
-      <p:sp>
-        <p:nvSpPr>
-          <p:cNvPr id="3" name="Rectangle 2"/>
-          <p:cNvSpPr/>
-          <p:nvPr/>
-        </p:nvSpPr>
-        <p:spPr>
-          <a:xfrm>
-            <a:off x="548640" y="1188720"/>
-            <a:ext cx="7680960" cy="5029200"/>
-          </a:xfrm>
-          <a:prstGeom prst="rect">
-            <a:avLst/>
-          </a:prstGeom>
-          <a:solidFill>
-            <a:srgbClr val="F7F8FA"/>
-          </a:solidFill>
-          <a:ln>
-            <a:solidFill>
-              <a:srgbClr val="C8CEDA"/>
-            </a:solidFill>
-          </a:ln>
-        </p:spPr>
-        <p:style>
-          <a:lnRef idx="1">
-            <a:schemeClr val="accent1"/>
-          </a:lnRef>
-          <a:fillRef idx="3">
-            <a:schemeClr val="accent1"/>
-          </a:fillRef>
-          <a:effectRef idx="2">
-            <a:schemeClr val="accent1"/>
-          </a:effectRef>
-          <a:fontRef idx="minor">
-            <a:schemeClr val="lt1"/>
-          </a:fontRef>
-        </p:style>
-        <p:txBody>
-          <a:bodyPr rtlCol="0" anchor="ctr"/>
-          <a:lstStyle/>
-          <a:p>
-            <a:pPr algn="ctr"/>
-          </a:p>
-        </p:txBody>
-      </p:sp>
-      <p:pic>
-        <p:nvPicPr>
-          <p:cNvPr id="4" name="Picture 3" descr="task_IO_TASK_SEMI_FINISH.png"/>
-          <p:cNvPicPr>
-            <a:picLocks noChangeAspect="1"/>
-          </p:cNvPicPr>
-          <p:nvPr/>
-        </p:nvPicPr>
-        <p:blipFill>
-          <a:blip r:embed="rId2"/>
-          <a:stretch>
-            <a:fillRect/>
-          </a:stretch>
-        </p:blipFill>
-        <p:spPr>
-          <a:xfrm>
-            <a:off x="877126" y="1280160"/>
-            <a:ext cx="7023987" cy="4846320"/>
-          </a:xfrm>
-          <a:prstGeom prst="rect">
-            <a:avLst/>
-          </a:prstGeom>
-        </p:spPr>
-      </p:pic>
-      <p:sp>
-        <p:nvSpPr>
-          <p:cNvPr id="5" name="TextBox 4"/>
-          <p:cNvSpPr txBox="1"/>
-          <p:nvPr/>
-        </p:nvSpPr>
-        <p:spPr>
-          <a:xfrm>
-            <a:off x="8503920" y="1188720"/>
-            <a:ext cx="3291840" cy="5029200"/>
-          </a:xfrm>
-          <a:prstGeom prst="rect">
-            <a:avLst/>
-          </a:prstGeom>
-          <a:noFill/>
-        </p:spPr>
-        <p:txBody>
-          <a:bodyPr wrap="square" anchor="t" lIns="45720" rIns="45720">
-            <a:spAutoFit/>
-          </a:bodyPr>
-          <a:lstStyle/>
-          <a:p>
-            <a:pPr algn="l"/>
-            <a:r>
-              <a:rPr sz="1300" b="1">
-                <a:solidFill>
-                  <a:srgbClr val="1E2761"/>
-                </a:solidFill>
-                <a:latin typeface="맑은 고딕"/>
-              </a:rPr>
-              <a:t>■ 메뉴 Path</a:t>
-            </a:r>
-          </a:p>
-          <a:p>
-            <a:pPr algn="l"/>
-            <a:r>
-              <a:rPr sz="1100" b="0">
-                <a:solidFill>
-                  <a:srgbClr val="595959"/>
-                </a:solidFill>
-                <a:latin typeface="맑은 고딕"/>
-              </a:rPr>
-              <a:t>ALL_TASK ▷ IO 탭 (단독 : TASK\IO_TASK\bin\Debug\IO_TASK_SEMI_FINISH.exe)</a:t>
-            </a:r>
-          </a:p>
-          <a:p>
-            <a:pPr algn="l"/>
-            <a:r>
-              <a:rPr sz="600" b="0">
-                <a:solidFill>
-                  <a:srgbClr val="595959"/>
-                </a:solidFill>
-                <a:latin typeface="맑은 고딕"/>
-              </a:rPr>
-              <a:t/>
-            </a:r>
-          </a:p>
-          <a:p>
-            <a:pPr algn="l"/>
-            <a:r>
-              <a:rPr sz="1300" b="1">
-                <a:solidFill>
-                  <a:srgbClr val="1E2761"/>
-                </a:solidFill>
-                <a:latin typeface="맑은 고딕"/>
-              </a:rPr>
-              <a:t>■ 프로그램 개요</a:t>
-            </a:r>
-          </a:p>
-          <a:p>
-            <a:pPr algn="l"/>
-            <a:r>
-              <a:rPr sz="1100" b="0">
-                <a:solidFill>
-                  <a:srgbClr val="595959"/>
-                </a:solidFill>
-                <a:latin typeface="맑은 고딕"/>
-              </a:rPr>
-              <a:t>작업 상태 기계. JOB_MST 를 읽어 CV/RGV/SC 지시를 내리고 완료를 판정한다.</a:t>
-            </a:r>
-          </a:p>
-          <a:p>
-            <a:pPr algn="l"/>
-            <a:r>
-              <a:rPr sz="600" b="0">
-                <a:solidFill>
-                  <a:srgbClr val="595959"/>
-                </a:solidFill>
-                <a:latin typeface="맑은 고딕"/>
-              </a:rPr>
-              <a:t/>
-            </a:r>
-          </a:p>
-          <a:p>
-            <a:pPr algn="l"/>
-            <a:r>
-              <a:rPr sz="1300" b="1">
-                <a:solidFill>
-                  <a:srgbClr val="1E2761"/>
-                </a:solidFill>
-                <a:latin typeface="맑은 고딕"/>
-              </a:rPr>
-              <a:t>■ 특기사항</a:t>
-            </a:r>
-          </a:p>
-          <a:p>
-            <a:pPr algn="l"/>
-            <a:r>
-              <a:rPr sz="1000" b="0">
-                <a:solidFill>
-                  <a:srgbClr val="595959"/>
-                </a:solidFill>
-                <a:latin typeface="맑은 고딕"/>
-              </a:rPr>
-              <a:t>· ENV_IOSCH.INI [CNF] : OUT_HOLD_SEC(출고 유지 유예) / IN_HS_STATUS(입고 통로 15·16) / MANUAL_DIR_HOLD_SEC(수동 방향 전환 뒤 자동 억제).</a:t>
-            </a:r>
-          </a:p>
-          <a:p>
-            <a:pPr algn="l"/>
-            <a:r>
-              <a:rPr sz="1000" b="0">
-                <a:solidFill>
-                  <a:srgbClr val="595959"/>
-                </a:solidFill>
-                <a:latin typeface="맑은 고딕"/>
-              </a:rPr>
-              <a:t>· 체류는 경고만 한다(체류복구 폐기). 완료는 설비 신호로만 판정한다.</a:t>
-            </a:r>
-          </a:p>
-        </p:txBody>
-      </p:sp>
-      <p:sp>
-        <p:nvSpPr>
-          <p:cNvPr id="6" name="TextBox 5"/>
-          <p:cNvSpPr txBox="1"/>
-          <p:nvPr/>
-        </p:nvSpPr>
-        <p:spPr>
-          <a:xfrm>
-            <a:off x="457200" y="6446520"/>
-            <a:ext cx="4572000" cy="320040"/>
-          </a:xfrm>
-          <a:prstGeom prst="rect">
-            <a:avLst/>
-          </a:prstGeom>
-          <a:noFill/>
-        </p:spPr>
-        <p:txBody>
-          <a:bodyPr wrap="square" anchor="t" lIns="45720" rIns="45720">
-            <a:spAutoFit/>
-          </a:bodyPr>
-          <a:lstStyle/>
-          <a:p>
-            <a:pPr algn="l"/>
-            <a:r>
-              <a:rPr sz="1000" b="0">
-                <a:solidFill>
-                  <a:srgbClr val="595959"/>
-                </a:solidFill>
-                <a:latin typeface="맑은 고딕"/>
-              </a:rPr>
-              <a:t>LG 화학 1동 ECS  |  화면설계서  |  Ver 1.3</a:t>
-            </a:r>
-          </a:p>
-        </p:txBody>
-      </p:sp>
-      <p:sp>
-        <p:nvSpPr>
-          <p:cNvPr id="7" name="TextBox 6"/>
-          <p:cNvSpPr txBox="1"/>
-          <p:nvPr/>
-        </p:nvSpPr>
-        <p:spPr>
-          <a:xfrm>
-            <a:off x="11155680" y="6446520"/>
-            <a:ext cx="731520" cy="320040"/>
-          </a:xfrm>
-          <a:prstGeom prst="rect">
-            <a:avLst/>
-          </a:prstGeom>
-          <a:noFill/>
-        </p:spPr>
-        <p:txBody>
-          <a:bodyPr wrap="square" anchor="t" lIns="45720" rIns="45720">
-            <a:spAutoFit/>
-          </a:bodyPr>
-          <a:lstStyle/>
-          <a:p>
-            <a:pPr algn="r"/>
-            <a:r>
-              <a:rPr sz="1000" b="0">
-                <a:solidFill>
-                  <a:srgbClr val="595959"/>
-                </a:solidFill>
-                <a:latin typeface="맑은 고딕"/>
-              </a:rPr>
-              <a:t>30</a:t>
-            </a:r>
-          </a:p>
-        </p:txBody>
-      </p:sp>
-    </p:spTree>
-  </p:cSld>
-  <p:clrMapOvr>
-    <a:masterClrMapping/>
-  </p:clrMapOvr>
-</p:sld>
-</file>
-
-<file path=ppt/slides/slide31.xml><?xml version="1.0" encoding="utf-8"?>
-<p:sld xmlns:a="http://schemas.openxmlformats.org/drawingml/2006/main" xmlns:p="http://schemas.openxmlformats.org/presentationml/2006/main" xmlns:r="http://schemas.openxmlformats.org/officeDocument/2006/relationships">
-  <p:cSld>
-    <p:spTree>
-      <p:nvGrpSpPr>
-        <p:cNvPr id="1" name=""/>
-        <p:cNvGrpSpPr/>
-        <p:nvPr/>
-      </p:nvGrpSpPr>
-      <p:grpSpPr/>
-      <p:sp>
-        <p:nvSpPr>
-          <p:cNvPr id="2" name="TextBox 1"/>
-          <p:cNvSpPr txBox="1"/>
-          <p:nvPr/>
-        </p:nvSpPr>
-        <p:spPr>
-          <a:xfrm>
-            <a:off x="457200" y="274320"/>
-            <a:ext cx="11247120" cy="640080"/>
-          </a:xfrm>
-          <a:prstGeom prst="rect">
-            <a:avLst/>
-          </a:prstGeom>
-          <a:noFill/>
-        </p:spPr>
-        <p:txBody>
-          <a:bodyPr wrap="square" anchor="ctr" lIns="45720" rIns="45720">
-            <a:spAutoFit/>
-          </a:bodyPr>
-          <a:lstStyle/>
-          <a:p>
-            <a:pPr algn="l"/>
-            <a:r>
-              <a:rPr sz="2600" b="1">
-                <a:solidFill>
-                  <a:srgbClr val="1E2761"/>
-                </a:solidFill>
-                <a:latin typeface="맑은 고딕"/>
-              </a:rPr>
-              <a:t>서버 프로그램 - 상위 통신 (WCS_TASK_HOST)</a:t>
-            </a:r>
-          </a:p>
-        </p:txBody>
-      </p:sp>
-      <p:sp>
-        <p:nvSpPr>
-          <p:cNvPr id="3" name="Rectangle 2"/>
-          <p:cNvSpPr/>
-          <p:nvPr/>
-        </p:nvSpPr>
-        <p:spPr>
-          <a:xfrm>
-            <a:off x="548640" y="1188720"/>
-            <a:ext cx="7680960" cy="5029200"/>
-          </a:xfrm>
-          <a:prstGeom prst="rect">
-            <a:avLst/>
-          </a:prstGeom>
-          <a:solidFill>
-            <a:srgbClr val="F7F8FA"/>
-          </a:solidFill>
-          <a:ln>
-            <a:solidFill>
-              <a:srgbClr val="C8CEDA"/>
-            </a:solidFill>
-          </a:ln>
-        </p:spPr>
-        <p:style>
-          <a:lnRef idx="1">
-            <a:schemeClr val="accent1"/>
-          </a:lnRef>
-          <a:fillRef idx="3">
-            <a:schemeClr val="accent1"/>
-          </a:fillRef>
-          <a:effectRef idx="2">
-            <a:schemeClr val="accent1"/>
-          </a:effectRef>
-          <a:fontRef idx="minor">
-            <a:schemeClr val="lt1"/>
-          </a:fontRef>
-        </p:style>
-        <p:txBody>
-          <a:bodyPr rtlCol="0" anchor="ctr"/>
-          <a:lstStyle/>
-          <a:p>
-            <a:pPr algn="ctr"/>
-          </a:p>
-        </p:txBody>
-      </p:sp>
-      <p:pic>
-        <p:nvPicPr>
-          <p:cNvPr id="4" name="Picture 3" descr="chk_TASK_LFC10_G1_ECSCOM.png"/>
-          <p:cNvPicPr>
-            <a:picLocks noChangeAspect="1"/>
-          </p:cNvPicPr>
-          <p:nvPr/>
-        </p:nvPicPr>
-        <p:blipFill>
-          <a:blip r:embed="rId2"/>
-          <a:stretch>
-            <a:fillRect/>
-          </a:stretch>
-        </p:blipFill>
-        <p:spPr>
-          <a:xfrm>
-            <a:off x="877126" y="1280160"/>
-            <a:ext cx="7023987" cy="4846320"/>
-          </a:xfrm>
-          <a:prstGeom prst="rect">
-            <a:avLst/>
-          </a:prstGeom>
-        </p:spPr>
-      </p:pic>
-      <p:sp>
-        <p:nvSpPr>
-          <p:cNvPr id="5" name="TextBox 4"/>
-          <p:cNvSpPr txBox="1"/>
-          <p:nvPr/>
-        </p:nvSpPr>
-        <p:spPr>
-          <a:xfrm>
-            <a:off x="8503920" y="1188720"/>
-            <a:ext cx="3291840" cy="5029200"/>
-          </a:xfrm>
-          <a:prstGeom prst="rect">
-            <a:avLst/>
-          </a:prstGeom>
-          <a:noFill/>
-        </p:spPr>
-        <p:txBody>
-          <a:bodyPr wrap="square" anchor="t" lIns="45720" rIns="45720">
-            <a:spAutoFit/>
-          </a:bodyPr>
-          <a:lstStyle/>
-          <a:p>
-            <a:pPr algn="l"/>
-            <a:r>
-              <a:rPr sz="1300" b="1">
-                <a:solidFill>
-                  <a:srgbClr val="1E2761"/>
-                </a:solidFill>
-                <a:latin typeface="맑은 고딕"/>
-              </a:rPr>
-              <a:t>■ 메뉴 Path</a:t>
-            </a:r>
-          </a:p>
-          <a:p>
-            <a:pPr algn="l"/>
-            <a:r>
-              <a:rPr sz="1100" b="0">
-                <a:solidFill>
-                  <a:srgbClr val="595959"/>
-                </a:solidFill>
-                <a:latin typeface="맑은 고딕"/>
-              </a:rPr>
-              <a:t>ALL_TASK ▷ HOST 탭 (단독 : TASK\WCS_TASK_HOST\bin\Debug\TASK_LFC10_G1_ECSCOM.exe)</a:t>
-            </a:r>
-          </a:p>
-          <a:p>
-            <a:pPr algn="l"/>
-            <a:r>
-              <a:rPr sz="600" b="0">
-                <a:solidFill>
-                  <a:srgbClr val="595959"/>
-                </a:solidFill>
-                <a:latin typeface="맑은 고딕"/>
-              </a:rPr>
-              <a:t/>
-            </a:r>
-          </a:p>
-          <a:p>
-            <a:pPr algn="l"/>
-            <a:r>
-              <a:rPr sz="1300" b="1">
-                <a:solidFill>
-                  <a:srgbClr val="1E2761"/>
-                </a:solidFill>
-                <a:latin typeface="맑은 고딕"/>
-              </a:rPr>
-              <a:t>■ 프로그램 개요</a:t>
-            </a:r>
-          </a:p>
-          <a:p>
-            <a:pPr algn="l"/>
-            <a:r>
-              <a:rPr sz="1100" b="0">
-                <a:solidFill>
-                  <a:srgbClr val="595959"/>
-                </a:solidFill>
-                <a:latin typeface="맑은 고딕"/>
-              </a:rPr>
-              <a:t>WMS/IMS 와 소켓(명령 수신/보고 송신)으로 전문을 교환한다. 스테이션 코드 변환(122→101, 124→104, 126→103, 129·130→102)을 담당한다.</a:t>
-            </a:r>
-          </a:p>
-          <a:p>
-            <a:pPr algn="l"/>
-            <a:r>
-              <a:rPr sz="600" b="0">
-                <a:solidFill>
-                  <a:srgbClr val="595959"/>
-                </a:solidFill>
-                <a:latin typeface="맑은 고딕"/>
-              </a:rPr>
-              <a:t/>
-            </a:r>
-          </a:p>
-          <a:p>
-            <a:pPr algn="l"/>
-            <a:r>
-              <a:rPr sz="1300" b="1">
-                <a:solidFill>
-                  <a:srgbClr val="1E2761"/>
-                </a:solidFill>
-                <a:latin typeface="맑은 고딕"/>
-              </a:rPr>
-              <a:t>■ 특기사항</a:t>
-            </a:r>
-          </a:p>
-          <a:p>
-            <a:pPr algn="l"/>
-            <a:r>
-              <a:rPr sz="1000" b="0">
-                <a:solidFill>
-                  <a:srgbClr val="595959"/>
-                </a:solidFill>
-                <a:latin typeface="맑은 고딕"/>
-              </a:rPr>
-              <a:t>· 완료(09)가 되면 즉시 F 를 보내고, 응답이 없으면 EcsComA.ini [Host] RE_REPORT_09_SEC(기본 60초)마다 다시 보낸다(5초 내 반영).</a:t>
-            </a:r>
-          </a:p>
-        </p:txBody>
-      </p:sp>
-      <p:sp>
-        <p:nvSpPr>
-          <p:cNvPr id="6" name="TextBox 5"/>
-          <p:cNvSpPr txBox="1"/>
-          <p:nvPr/>
-        </p:nvSpPr>
-        <p:spPr>
-          <a:xfrm>
-            <a:off x="457200" y="6446520"/>
-            <a:ext cx="4572000" cy="320040"/>
-          </a:xfrm>
-          <a:prstGeom prst="rect">
-            <a:avLst/>
-          </a:prstGeom>
-          <a:noFill/>
-        </p:spPr>
-        <p:txBody>
-          <a:bodyPr wrap="square" anchor="t" lIns="45720" rIns="45720">
-            <a:spAutoFit/>
-          </a:bodyPr>
-          <a:lstStyle/>
-          <a:p>
-            <a:pPr algn="l"/>
-            <a:r>
-              <a:rPr sz="1000" b="0">
-                <a:solidFill>
-                  <a:srgbClr val="595959"/>
-                </a:solidFill>
-                <a:latin typeface="맑은 고딕"/>
-              </a:rPr>
-              <a:t>LG 화학 1동 ECS  |  화면설계서  |  Ver 1.3</a:t>
-            </a:r>
-          </a:p>
-        </p:txBody>
-      </p:sp>
-      <p:sp>
-        <p:nvSpPr>
-          <p:cNvPr id="7" name="TextBox 6"/>
-          <p:cNvSpPr txBox="1"/>
-          <p:nvPr/>
-        </p:nvSpPr>
-        <p:spPr>
-          <a:xfrm>
-            <a:off x="11155680" y="6446520"/>
-            <a:ext cx="731520" cy="320040"/>
-          </a:xfrm>
-          <a:prstGeom prst="rect">
-            <a:avLst/>
-          </a:prstGeom>
-          <a:noFill/>
-        </p:spPr>
-        <p:txBody>
-          <a:bodyPr wrap="square" anchor="t" lIns="45720" rIns="45720">
-            <a:spAutoFit/>
-          </a:bodyPr>
-          <a:lstStyle/>
-          <a:p>
-            <a:pPr algn="r"/>
-            <a:r>
-              <a:rPr sz="1000" b="0">
-                <a:solidFill>
-                  <a:srgbClr val="595959"/>
-                </a:solidFill>
-                <a:latin typeface="맑은 고딕"/>
-              </a:rPr>
-              <a:t>31</a:t>
-            </a:r>
-          </a:p>
-        </p:txBody>
-      </p:sp>
-    </p:spTree>
-  </p:cSld>
-  <p:clrMapOvr>
-    <a:masterClrMapping/>
-  </p:clrMapOvr>
-</p:sld>
-</file>
-
-<file path=ppt/slides/slide32.xml><?xml version="1.0" encoding="utf-8"?>
+<file path=ppt/slides/slide26.xml><?xml version="1.0" encoding="utf-8"?>
 <p:sld xmlns:a="http://schemas.openxmlformats.org/drawingml/2006/main" xmlns:p="http://schemas.openxmlformats.org/presentationml/2006/main" xmlns:r="http://schemas.openxmlformats.org/officeDocument/2006/relationships">
   <p:cSld>
     <p:spTree>
@@ -13376,7 +10700,7 @@
                 </a:solidFill>
                 <a:latin typeface="맑은 고딕"/>
               </a:rPr>
-              <a:t>LG 화학 1동 ECS  |  화면설계서  |  Ver 1.3</a:t>
+              <a:t>LG 화학 1동 ECS  |  화면설계서  |  Ver 1.4</a:t>
             </a:r>
           </a:p>
         </p:txBody>
@@ -13411,7 +10735,7 @@
                 </a:solidFill>
                 <a:latin typeface="맑은 고딕"/>
               </a:rPr>
-              <a:t>32</a:t>
+              <a:t>26</a:t>
             </a:r>
           </a:p>
         </p:txBody>
@@ -13424,7 +10748,7 @@
 </p:sld>
 </file>
 
-<file path=ppt/slides/slide33.xml><?xml version="1.0" encoding="utf-8"?>
+<file path=ppt/slides/slide27.xml><?xml version="1.0" encoding="utf-8"?>
 <p:sld xmlns:a="http://schemas.openxmlformats.org/drawingml/2006/main" xmlns:p="http://schemas.openxmlformats.org/presentationml/2006/main" xmlns:r="http://schemas.openxmlformats.org/officeDocument/2006/relationships">
   <p:cSld>
     <p:spTree>
@@ -13464,7 +10788,7 @@
                 </a:solidFill>
                 <a:latin typeface="맑은 고딕"/>
               </a:rPr>
-              <a:t>부록 - 설계 결정 · 변경 이력 (V1.3)</a:t>
+              <a:t>부록 - 설계 결정 · 변경 이력 (V1.4)</a:t>
             </a:r>
           </a:p>
         </p:txBody>
@@ -13479,7 +10803,7 @@
         </p:nvGraphicFramePr>
         <p:xfrm>
           <a:off x="457200" y="1097280"/>
-          <a:ext cx="11338560" cy="6144768"/>
+          <a:ext cx="11338560" cy="7680960"/>
         </p:xfrm>
         <a:graphic>
           <a:graphicData uri="http://schemas.openxmlformats.org/drawingml/2006/table">
@@ -14580,6 +11904,278 @@
                   </a:tcPr>
                 </a:tc>
               </a:tr>
+              <a:tr h="384048">
+                <a:tc>
+                  <a:txBody>
+                    <a:bodyPr/>
+                    <a:lstStyle/>
+                    <a:p>
+                      <a:r>
+                        <a:rPr sz="1050">
+                          <a:solidFill>
+                            <a:srgbClr val="222222"/>
+                          </a:solidFill>
+                          <a:latin typeface="맑은 고딕"/>
+                        </a:rPr>
+                        <a:t>16</a:t>
+                      </a:r>
+                    </a:p>
+                  </a:txBody>
+                  <a:tcPr marT="27432" marB="27432">
+                    <a:solidFill>
+                      <a:srgbClr val="EEF1F7"/>
+                    </a:solidFill>
+                  </a:tcPr>
+                </a:tc>
+                <a:tc>
+                  <a:txBody>
+                    <a:bodyPr/>
+                    <a:lstStyle/>
+                    <a:p>
+                      <a:r>
+                        <a:rPr sz="1050">
+                          <a:solidFill>
+                            <a:srgbClr val="222222"/>
+                          </a:solidFill>
+                          <a:latin typeface="맑은 고딕"/>
+                        </a:rPr>
+                        <a:t>크레인 · RTV 수동지시</a:t>
+                      </a:r>
+                    </a:p>
+                  </a:txBody>
+                  <a:tcPr marT="27432" marB="27432">
+                    <a:solidFill>
+                      <a:srgbClr val="EEF1F7"/>
+                    </a:solidFill>
+                  </a:tcPr>
+                </a:tc>
+                <a:tc>
+                  <a:txBody>
+                    <a:bodyPr/>
+                    <a:lstStyle/>
+                    <a:p>
+                      <a:r>
+                        <a:rPr sz="1050">
+                          <a:solidFill>
+                            <a:srgbClr val="222222"/>
+                          </a:solidFill>
+                          <a:latin typeface="맑은 고딕"/>
+                        </a:rPr>
+                        <a:t>폐기. 리본 [SC]·[RTV] 버튼과 설비 상태창 [수동지시] 를 함께 없앴다 (2026-09-28)</a:t>
+                      </a:r>
+                    </a:p>
+                  </a:txBody>
+                  <a:tcPr marT="27432" marB="27432">
+                    <a:solidFill>
+                      <a:srgbClr val="EEF1F7"/>
+                    </a:solidFill>
+                  </a:tcPr>
+                </a:tc>
+              </a:tr>
+              <a:tr h="384048">
+                <a:tc>
+                  <a:txBody>
+                    <a:bodyPr/>
+                    <a:lstStyle/>
+                    <a:p>
+                      <a:r>
+                        <a:rPr sz="1050">
+                          <a:solidFill>
+                            <a:srgbClr val="222222"/>
+                          </a:solidFill>
+                          <a:latin typeface="맑은 고딕"/>
+                        </a:rPr>
+                        <a:t>17</a:t>
+                      </a:r>
+                    </a:p>
+                  </a:txBody>
+                  <a:tcPr marT="27432" marB="27432">
+                    <a:solidFill>
+                      <a:srgbClr val="FFFFFF"/>
+                    </a:solidFill>
+                  </a:tcPr>
+                </a:tc>
+                <a:tc>
+                  <a:txBody>
+                    <a:bodyPr/>
+                    <a:lstStyle/>
+                    <a:p>
+                      <a:r>
+                        <a:rPr sz="1050">
+                          <a:solidFill>
+                            <a:srgbClr val="222222"/>
+                          </a:solidFill>
+                          <a:latin typeface="맑은 고딕"/>
+                        </a:rPr>
+                        <a:t>알람</a:t>
+                      </a:r>
+                    </a:p>
+                  </a:txBody>
+                  <a:tcPr marT="27432" marB="27432">
+                    <a:solidFill>
+                      <a:srgbClr val="FFFFFF"/>
+                    </a:solidFill>
+                  </a:tcPr>
+                </a:tc>
+                <a:tc>
+                  <a:txBody>
+                    <a:bodyPr/>
+                    <a:lstStyle/>
+                    <a:p>
+                      <a:r>
+                        <a:rPr sz="1050">
+                          <a:solidFill>
+                            <a:srgbClr val="222222"/>
+                          </a:solidFill>
+                          <a:latin typeface="맑은 고딕"/>
+                        </a:rPr>
+                        <a:t>오래 멈춘 화물(체류) 알람 폐기. 알람은 설비 에러가 뜰 때만 올라온다 (2026-09-28)</a:t>
+                      </a:r>
+                    </a:p>
+                  </a:txBody>
+                  <a:tcPr marT="27432" marB="27432">
+                    <a:solidFill>
+                      <a:srgbClr val="FFFFFF"/>
+                    </a:solidFill>
+                  </a:tcPr>
+                </a:tc>
+              </a:tr>
+              <a:tr h="384048">
+                <a:tc>
+                  <a:txBody>
+                    <a:bodyPr/>
+                    <a:lstStyle/>
+                    <a:p>
+                      <a:r>
+                        <a:rPr sz="1050">
+                          <a:solidFill>
+                            <a:srgbClr val="222222"/>
+                          </a:solidFill>
+                          <a:latin typeface="맑은 고딕"/>
+                        </a:rPr>
+                        <a:t>18</a:t>
+                      </a:r>
+                    </a:p>
+                  </a:txBody>
+                  <a:tcPr marT="27432" marB="27432">
+                    <a:solidFill>
+                      <a:srgbClr val="EEF1F7"/>
+                    </a:solidFill>
+                  </a:tcPr>
+                </a:tc>
+                <a:tc>
+                  <a:txBody>
+                    <a:bodyPr/>
+                    <a:lstStyle/>
+                    <a:p>
+                      <a:r>
+                        <a:rPr sz="1050">
+                          <a:solidFill>
+                            <a:srgbClr val="222222"/>
+                          </a:solidFill>
+                          <a:latin typeface="맑은 고딕"/>
+                        </a:rPr>
+                        <a:t>서버 프로그램(TASK) 장</a:t>
+                      </a:r>
+                    </a:p>
+                  </a:txBody>
+                  <a:tcPr marT="27432" marB="27432">
+                    <a:solidFill>
+                      <a:srgbClr val="EEF1F7"/>
+                    </a:solidFill>
+                  </a:tcPr>
+                </a:tc>
+                <a:tc>
+                  <a:txBody>
+                    <a:bodyPr/>
+                    <a:lstStyle/>
+                    <a:p>
+                      <a:r>
+                        <a:rPr sz="1050">
+                          <a:solidFill>
+                            <a:srgbClr val="222222"/>
+                          </a:solidFill>
+                          <a:latin typeface="맑은 고딕"/>
+                        </a:rPr>
+                        <a:t>이 문서에서 뺐다. 관리자 매뉴얼에서 다룬다 (2026-09-28)</a:t>
+                      </a:r>
+                    </a:p>
+                  </a:txBody>
+                  <a:tcPr marT="27432" marB="27432">
+                    <a:solidFill>
+                      <a:srgbClr val="EEF1F7"/>
+                    </a:solidFill>
+                  </a:tcPr>
+                </a:tc>
+              </a:tr>
+              <a:tr h="384048">
+                <a:tc>
+                  <a:txBody>
+                    <a:bodyPr/>
+                    <a:lstStyle/>
+                    <a:p>
+                      <a:r>
+                        <a:rPr sz="1050">
+                          <a:solidFill>
+                            <a:srgbClr val="222222"/>
+                          </a:solidFill>
+                          <a:latin typeface="맑은 고딕"/>
+                        </a:rPr>
+                        <a:t>19</a:t>
+                      </a:r>
+                    </a:p>
+                  </a:txBody>
+                  <a:tcPr marT="27432" marB="27432">
+                    <a:solidFill>
+                      <a:srgbClr val="FFFFFF"/>
+                    </a:solidFill>
+                  </a:tcPr>
+                </a:tc>
+                <a:tc>
+                  <a:txBody>
+                    <a:bodyPr/>
+                    <a:lstStyle/>
+                    <a:p>
+                      <a:r>
+                        <a:rPr sz="1050">
+                          <a:solidFill>
+                            <a:srgbClr val="222222"/>
+                          </a:solidFill>
+                          <a:latin typeface="맑은 고딕"/>
+                        </a:rPr>
+                        <a:t>EQP_TASK 아이콘</a:t>
+                      </a:r>
+                    </a:p>
+                  </a:txBody>
+                  <a:tcPr marT="27432" marB="27432">
+                    <a:solidFill>
+                      <a:srgbClr val="FFFFFF"/>
+                    </a:solidFill>
+                  </a:tcPr>
+                </a:tc>
+                <a:tc>
+                  <a:txBody>
+                    <a:bodyPr/>
+                    <a:lstStyle/>
+                    <a:p>
+                      <a:r>
+                        <a:rPr sz="1050">
+                          <a:solidFill>
+                            <a:srgbClr val="222222"/>
+                          </a:solidFill>
+                          <a:latin typeface="맑은 고딕"/>
+                        </a:rPr>
+                        <a:t>WCS_DB.INI [CNF] APP_ICON = CV / EQP 로 고른다 (2026-09-28)</a:t>
+                      </a:r>
+                    </a:p>
+                  </a:txBody>
+                  <a:tcPr marT="27432" marB="27432">
+                    <a:solidFill>
+                      <a:srgbClr val="FFFFFF"/>
+                    </a:solidFill>
+                  </a:tcPr>
+                </a:tc>
+              </a:tr>
             </a:tbl>
           </a:graphicData>
         </a:graphic>
@@ -14614,7 +12210,7 @@
                 </a:solidFill>
                 <a:latin typeface="맑은 고딕"/>
               </a:rPr>
-              <a:t>캡처 : 메인 · 리본 · C/V 상태 · 작업정보 · EQP 정보 · 찾기 · 이력삭제 · 범례 · 수동지시 = 2026-09-27 전체화면(1920×1080). S/C · RTV 상태와 로그 창 = 2026-09-21 판(구성 변경 없음).</a:t>
+              <a:t>캡처 : 메인 · 리본 · 설비 상태창 · 작업정보 · EQP 정보 · 찾기 · 이력삭제 · 범례 · 수동지시 = 2026-09-28 전체화면(1920×1080). 로그 창 = 2026-09-21 판(구성 변경 없음).</a:t>
             </a:r>
           </a:p>
         </p:txBody>
@@ -14649,7 +12245,7 @@
                 </a:solidFill>
                 <a:latin typeface="맑은 고딕"/>
               </a:rPr>
-              <a:t>LG 화학 1동 ECS  |  화면설계서  |  Ver 1.3</a:t>
+              <a:t>LG 화학 1동 ECS  |  화면설계서  |  Ver 1.4</a:t>
             </a:r>
           </a:p>
         </p:txBody>
@@ -14684,7 +12280,679 @@
                 </a:solidFill>
                 <a:latin typeface="맑은 고딕"/>
               </a:rPr>
-              <a:t>33</a:t>
+              <a:t>27</a:t>
+            </a:r>
+          </a:p>
+        </p:txBody>
+      </p:sp>
+    </p:spTree>
+  </p:cSld>
+  <p:clrMapOvr>
+    <a:masterClrMapping/>
+  </p:clrMapOvr>
+</p:sld>
+</file>
+
+<file path=ppt/slides/slide3.xml><?xml version="1.0" encoding="utf-8"?>
+<p:sld xmlns:a="http://schemas.openxmlformats.org/drawingml/2006/main" xmlns:p="http://schemas.openxmlformats.org/presentationml/2006/main" xmlns:r="http://schemas.openxmlformats.org/officeDocument/2006/relationships">
+  <p:cSld>
+    <p:spTree>
+      <p:nvGrpSpPr>
+        <p:cNvPr id="1" name=""/>
+        <p:cNvGrpSpPr/>
+        <p:nvPr/>
+      </p:nvGrpSpPr>
+      <p:grpSpPr/>
+      <p:sp>
+        <p:nvSpPr>
+          <p:cNvPr id="2" name="TextBox 1"/>
+          <p:cNvSpPr txBox="1"/>
+          <p:nvPr/>
+        </p:nvSpPr>
+        <p:spPr>
+          <a:xfrm>
+            <a:off x="457200" y="274320"/>
+            <a:ext cx="11247120" cy="640080"/>
+          </a:xfrm>
+          <a:prstGeom prst="rect">
+            <a:avLst/>
+          </a:prstGeom>
+          <a:noFill/>
+        </p:spPr>
+        <p:txBody>
+          <a:bodyPr wrap="square" anchor="ctr" lIns="45720" rIns="45720">
+            <a:spAutoFit/>
+          </a:bodyPr>
+          <a:lstStyle/>
+          <a:p>
+            <a:pPr algn="l"/>
+            <a:r>
+              <a:rPr sz="2600" b="1">
+                <a:solidFill>
+                  <a:srgbClr val="1E2761"/>
+                </a:solidFill>
+                <a:latin typeface="맑은 고딕"/>
+              </a:rPr>
+              <a:t>Contents</a:t>
+            </a:r>
+          </a:p>
+        </p:txBody>
+      </p:sp>
+      <p:sp>
+        <p:nvSpPr>
+          <p:cNvPr id="3" name="TextBox 2"/>
+          <p:cNvSpPr txBox="1"/>
+          <p:nvPr/>
+        </p:nvSpPr>
+        <p:spPr>
+          <a:xfrm>
+            <a:off x="548640" y="1097280"/>
+            <a:ext cx="3657600" cy="5212080"/>
+          </a:xfrm>
+          <a:prstGeom prst="rect">
+            <a:avLst/>
+          </a:prstGeom>
+          <a:noFill/>
+        </p:spPr>
+        <p:txBody>
+          <a:bodyPr wrap="square" anchor="t" lIns="45720" rIns="45720">
+            <a:spAutoFit/>
+          </a:bodyPr>
+          <a:lstStyle/>
+          <a:p>
+            <a:pPr algn="l"/>
+            <a:r>
+              <a:rPr sz="1400" b="1">
+                <a:solidFill>
+                  <a:srgbClr val="1E2761"/>
+                </a:solidFill>
+                <a:latin typeface="맑은 고딕"/>
+              </a:rPr>
+              <a:t>메인</a:t>
+            </a:r>
+          </a:p>
+          <a:p>
+            <a:pPr algn="l"/>
+            <a:r>
+              <a:rPr sz="1100" b="0">
+                <a:solidFill>
+                  <a:srgbClr val="595959"/>
+                </a:solidFill>
+                <a:latin typeface="맑은 고딕"/>
+              </a:rPr>
+              <a:t>   메인 화면 (전체화면)</a:t>
+            </a:r>
+          </a:p>
+          <a:p>
+            <a:pPr algn="l"/>
+            <a:r>
+              <a:rPr sz="1100" b="0">
+                <a:solidFill>
+                  <a:srgbClr val="595959"/>
+                </a:solidFill>
+                <a:latin typeface="맑은 고딕"/>
+              </a:rPr>
+              <a:t>   메인 화면 영역 구성</a:t>
+            </a:r>
+          </a:p>
+          <a:p>
+            <a:pPr algn="l"/>
+            <a:r>
+              <a:rPr sz="1100" b="0">
+                <a:solidFill>
+                  <a:srgbClr val="595959"/>
+                </a:solidFill>
+                <a:latin typeface="맑은 고딕"/>
+              </a:rPr>
+              <a:t>   리본 메뉴</a:t>
+            </a:r>
+          </a:p>
+          <a:p>
+            <a:pPr algn="l"/>
+            <a:r>
+              <a:rPr sz="1100" b="0">
+                <a:solidFill>
+                  <a:srgbClr val="595959"/>
+                </a:solidFill>
+                <a:latin typeface="맑은 고딕"/>
+              </a:rPr>
+              <a:t>   왼쪽 고정 칸 ① 통신 상태 · 범례</a:t>
+            </a:r>
+          </a:p>
+          <a:p>
+            <a:pPr algn="l"/>
+            <a:r>
+              <a:rPr sz="1100" b="0">
+                <a:solidFill>
+                  <a:srgbClr val="595959"/>
+                </a:solidFill>
+                <a:latin typeface="맑은 고딕"/>
+              </a:rPr>
+              <a:t>   왼쪽 고정 칸 ② 설비 반송 · 작업정보</a:t>
+            </a:r>
+          </a:p>
+          <a:p>
+            <a:pPr algn="l"/>
+            <a:r>
+              <a:rPr sz="1100" b="0">
+                <a:solidFill>
+                  <a:srgbClr val="595959"/>
+                </a:solidFill>
+                <a:latin typeface="맑은 고딕"/>
+              </a:rPr>
+              <a:t>   설비 그림 · 마우스 동작</a:t>
+            </a:r>
+          </a:p>
+          <a:p>
+            <a:pPr algn="l"/>
+            <a:r>
+              <a:rPr sz="600" b="0">
+                <a:solidFill>
+                  <a:srgbClr val="595959"/>
+                </a:solidFill>
+                <a:latin typeface="맑은 고딕"/>
+              </a:rPr>
+              <a:t/>
+            </a:r>
+          </a:p>
+          <a:p>
+            <a:pPr algn="l"/>
+            <a:r>
+              <a:rPr sz="1400" b="1">
+                <a:solidFill>
+                  <a:srgbClr val="1E2761"/>
+                </a:solidFill>
+                <a:latin typeface="맑은 고딕"/>
+              </a:rPr>
+              <a:t>설비 대화상자</a:t>
+            </a:r>
+          </a:p>
+          <a:p>
+            <a:pPr algn="l"/>
+            <a:r>
+              <a:rPr sz="1100" b="0">
+                <a:solidFill>
+                  <a:srgbClr val="595959"/>
+                </a:solidFill>
+                <a:latin typeface="맑은 고딕"/>
+              </a:rPr>
+              <a:t>   CV 상태</a:t>
+            </a:r>
+          </a:p>
+          <a:p>
+            <a:pPr algn="l"/>
+            <a:r>
+              <a:rPr sz="1100" b="0">
+                <a:solidFill>
+                  <a:srgbClr val="595959"/>
+                </a:solidFill>
+                <a:latin typeface="맑은 고딕"/>
+              </a:rPr>
+              <a:t>   SC 상태</a:t>
+            </a:r>
+          </a:p>
+          <a:p>
+            <a:pPr algn="l"/>
+            <a:r>
+              <a:rPr sz="1100" b="0">
+                <a:solidFill>
+                  <a:srgbClr val="595959"/>
+                </a:solidFill>
+                <a:latin typeface="맑은 고딕"/>
+              </a:rPr>
+              <a:t>   RTV(RGV) 상태</a:t>
+            </a:r>
+          </a:p>
+          <a:p>
+            <a:pPr algn="l"/>
+            <a:r>
+              <a:rPr sz="600" b="0">
+                <a:solidFill>
+                  <a:srgbClr val="595959"/>
+                </a:solidFill>
+                <a:latin typeface="맑은 고딕"/>
+              </a:rPr>
+              <a:t/>
+            </a:r>
+          </a:p>
+        </p:txBody>
+      </p:sp>
+      <p:sp>
+        <p:nvSpPr>
+          <p:cNvPr id="4" name="TextBox 3"/>
+          <p:cNvSpPr txBox="1"/>
+          <p:nvPr/>
+        </p:nvSpPr>
+        <p:spPr>
+          <a:xfrm>
+            <a:off x="4343400" y="1097280"/>
+            <a:ext cx="3657600" cy="5212080"/>
+          </a:xfrm>
+          <a:prstGeom prst="rect">
+            <a:avLst/>
+          </a:prstGeom>
+          <a:noFill/>
+        </p:spPr>
+        <p:txBody>
+          <a:bodyPr wrap="square" anchor="t" lIns="45720" rIns="45720">
+            <a:spAutoFit/>
+          </a:bodyPr>
+          <a:lstStyle/>
+          <a:p>
+            <a:pPr algn="l"/>
+            <a:r>
+              <a:rPr sz="1400" b="1">
+                <a:solidFill>
+                  <a:srgbClr val="1E2761"/>
+                </a:solidFill>
+                <a:latin typeface="맑은 고딕"/>
+              </a:rPr>
+              <a:t>ECS&gt;환경설정</a:t>
+            </a:r>
+          </a:p>
+          <a:p>
+            <a:pPr algn="l"/>
+            <a:r>
+              <a:rPr sz="1100" b="0">
+                <a:solidFill>
+                  <a:srgbClr val="595959"/>
+                </a:solidFill>
+                <a:latin typeface="맑은 고딕"/>
+              </a:rPr>
+              <a:t>   통신 연결 정의 (EQP 정보)</a:t>
+            </a:r>
+          </a:p>
+          <a:p>
+            <a:pPr algn="l"/>
+            <a:r>
+              <a:rPr sz="1100" b="0">
+                <a:solidFill>
+                  <a:srgbClr val="595959"/>
+                </a:solidFill>
+                <a:latin typeface="맑은 고딕"/>
+              </a:rPr>
+              <a:t>   로그 삭제 설정 (이력 삭제 주기 변경)</a:t>
+            </a:r>
+          </a:p>
+          <a:p>
+            <a:pPr algn="l"/>
+            <a:r>
+              <a:rPr sz="1100" b="0">
+                <a:solidFill>
+                  <a:srgbClr val="595959"/>
+                </a:solidFill>
+                <a:latin typeface="맑은 고딕"/>
+              </a:rPr>
+              <a:t>   범례 (색상정보)</a:t>
+            </a:r>
+          </a:p>
+          <a:p>
+            <a:pPr algn="l"/>
+            <a:r>
+              <a:rPr sz="600" b="0">
+                <a:solidFill>
+                  <a:srgbClr val="595959"/>
+                </a:solidFill>
+                <a:latin typeface="맑은 고딕"/>
+              </a:rPr>
+              <a:t/>
+            </a:r>
+          </a:p>
+          <a:p>
+            <a:pPr algn="l"/>
+            <a:r>
+              <a:rPr sz="1400" b="1">
+                <a:solidFill>
+                  <a:srgbClr val="1E2761"/>
+                </a:solidFill>
+                <a:latin typeface="맑은 고딕"/>
+              </a:rPr>
+              <a:t>MANUAL</a:t>
+            </a:r>
+          </a:p>
+          <a:p>
+            <a:pPr algn="l"/>
+            <a:r>
+              <a:rPr sz="1100" b="0">
+                <a:solidFill>
+                  <a:srgbClr val="595959"/>
+                </a:solidFill>
+                <a:latin typeface="맑은 고딕"/>
+              </a:rPr>
+              <a:t>   JOB 수동지시</a:t>
+            </a:r>
+          </a:p>
+          <a:p>
+            <a:pPr algn="l"/>
+            <a:r>
+              <a:rPr sz="600" b="0">
+                <a:solidFill>
+                  <a:srgbClr val="595959"/>
+                </a:solidFill>
+                <a:latin typeface="맑은 고딕"/>
+              </a:rPr>
+              <a:t/>
+            </a:r>
+          </a:p>
+          <a:p>
+            <a:pPr algn="l"/>
+            <a:r>
+              <a:rPr sz="1400" b="1">
+                <a:solidFill>
+                  <a:srgbClr val="1E2761"/>
+                </a:solidFill>
+                <a:latin typeface="맑은 고딕"/>
+              </a:rPr>
+              <a:t>부록</a:t>
+            </a:r>
+          </a:p>
+          <a:p>
+            <a:pPr algn="l"/>
+            <a:r>
+              <a:rPr sz="1100" b="0">
+                <a:solidFill>
+                  <a:srgbClr val="595959"/>
+                </a:solidFill>
+                <a:latin typeface="맑은 고딕"/>
+              </a:rPr>
+              <a:t>   Ecs.ini 화면 설정</a:t>
+            </a:r>
+          </a:p>
+          <a:p>
+            <a:pPr algn="l"/>
+            <a:r>
+              <a:rPr sz="1100" b="0">
+                <a:solidFill>
+                  <a:srgbClr val="595959"/>
+                </a:solidFill>
+                <a:latin typeface="맑은 고딕"/>
+              </a:rPr>
+              <a:t>   설계 결정 · 변경 이력</a:t>
+            </a:r>
+          </a:p>
+          <a:p>
+            <a:pPr algn="l"/>
+            <a:r>
+              <a:rPr sz="600" b="0">
+                <a:solidFill>
+                  <a:srgbClr val="595959"/>
+                </a:solidFill>
+                <a:latin typeface="맑은 고딕"/>
+              </a:rPr>
+              <a:t/>
+            </a:r>
+          </a:p>
+        </p:txBody>
+      </p:sp>
+      <p:sp>
+        <p:nvSpPr>
+          <p:cNvPr id="5" name="TextBox 4"/>
+          <p:cNvSpPr txBox="1"/>
+          <p:nvPr/>
+        </p:nvSpPr>
+        <p:spPr>
+          <a:xfrm>
+            <a:off x="8138160" y="1097280"/>
+            <a:ext cx="3657600" cy="5212080"/>
+          </a:xfrm>
+          <a:prstGeom prst="rect">
+            <a:avLst/>
+          </a:prstGeom>
+          <a:noFill/>
+        </p:spPr>
+        <p:txBody>
+          <a:bodyPr wrap="square" anchor="t" lIns="45720" rIns="45720">
+            <a:spAutoFit/>
+          </a:bodyPr>
+          <a:lstStyle/>
+          <a:p>
+            <a:pPr algn="l"/>
+            <a:r>
+              <a:rPr sz="1400" b="1">
+                <a:solidFill>
+                  <a:srgbClr val="1E2761"/>
+                </a:solidFill>
+                <a:latin typeface="맑은 고딕"/>
+              </a:rPr>
+              <a:t>ECS&gt;뷰</a:t>
+            </a:r>
+          </a:p>
+          <a:p>
+            <a:pPr algn="l"/>
+            <a:r>
+              <a:rPr sz="1100" b="0">
+                <a:solidFill>
+                  <a:srgbClr val="595959"/>
+                </a:solidFill>
+                <a:latin typeface="맑은 고딕"/>
+              </a:rPr>
+              <a:t>   작업정보</a:t>
+            </a:r>
+          </a:p>
+          <a:p>
+            <a:pPr algn="l"/>
+            <a:r>
+              <a:rPr sz="1100" b="0">
+                <a:solidFill>
+                  <a:srgbClr val="595959"/>
+                </a:solidFill>
+                <a:latin typeface="맑은 고딕"/>
+              </a:rPr>
+              <a:t>   찾기</a:t>
+            </a:r>
+          </a:p>
+          <a:p>
+            <a:pPr algn="l"/>
+            <a:r>
+              <a:rPr sz="600" b="0">
+                <a:solidFill>
+                  <a:srgbClr val="595959"/>
+                </a:solidFill>
+                <a:latin typeface="맑은 고딕"/>
+              </a:rPr>
+              <a:t/>
+            </a:r>
+          </a:p>
+          <a:p>
+            <a:pPr algn="l"/>
+            <a:r>
+              <a:rPr sz="1400" b="1">
+                <a:solidFill>
+                  <a:srgbClr val="1E2761"/>
+                </a:solidFill>
+                <a:latin typeface="맑은 고딕"/>
+              </a:rPr>
+              <a:t>ECS&gt;창고 모니터링</a:t>
+            </a:r>
+          </a:p>
+          <a:p>
+            <a:pPr algn="l"/>
+            <a:r>
+              <a:rPr sz="1100" b="0">
+                <a:solidFill>
+                  <a:srgbClr val="595959"/>
+                </a:solidFill>
+                <a:latin typeface="맑은 고딕"/>
+              </a:rPr>
+              <a:t>   작업번호 / 트랙번호 / 적재용기 표시 전환</a:t>
+            </a:r>
+          </a:p>
+          <a:p>
+            <a:pPr algn="l"/>
+            <a:r>
+              <a:rPr sz="600" b="0">
+                <a:solidFill>
+                  <a:srgbClr val="595959"/>
+                </a:solidFill>
+                <a:latin typeface="맑은 고딕"/>
+              </a:rPr>
+              <a:t/>
+            </a:r>
+          </a:p>
+          <a:p>
+            <a:pPr algn="l"/>
+            <a:r>
+              <a:rPr sz="1400" b="1">
+                <a:solidFill>
+                  <a:srgbClr val="1E2761"/>
+                </a:solidFill>
+                <a:latin typeface="맑은 고딕"/>
+              </a:rPr>
+              <a:t>LOG</a:t>
+            </a:r>
+          </a:p>
+          <a:p>
+            <a:pPr algn="l"/>
+            <a:r>
+              <a:rPr sz="1100" b="0">
+                <a:solidFill>
+                  <a:srgbClr val="595959"/>
+                </a:solidFill>
+                <a:latin typeface="맑은 고딕"/>
+              </a:rPr>
+              <a:t>   작업 로그</a:t>
+            </a:r>
+          </a:p>
+          <a:p>
+            <a:pPr algn="l"/>
+            <a:r>
+              <a:rPr sz="1100" b="0">
+                <a:solidFill>
+                  <a:srgbClr val="595959"/>
+                </a:solidFill>
+                <a:latin typeface="맑은 고딕"/>
+              </a:rPr>
+              <a:t>   HOST 로그</a:t>
+            </a:r>
+          </a:p>
+          <a:p>
+            <a:pPr algn="l"/>
+            <a:r>
+              <a:rPr sz="1100" b="0">
+                <a:solidFill>
+                  <a:srgbClr val="595959"/>
+                </a:solidFill>
+                <a:latin typeface="맑은 고딕"/>
+              </a:rPr>
+              <a:t>   설비에러이력</a:t>
+            </a:r>
+          </a:p>
+          <a:p>
+            <a:pPr algn="l"/>
+            <a:r>
+              <a:rPr sz="1100" b="0">
+                <a:solidFill>
+                  <a:srgbClr val="595959"/>
+                </a:solidFill>
+                <a:latin typeface="맑은 고딕"/>
+              </a:rPr>
+              <a:t>   유저사용 로그</a:t>
+            </a:r>
+          </a:p>
+          <a:p>
+            <a:pPr algn="l"/>
+            <a:r>
+              <a:rPr sz="1100" b="0">
+                <a:solidFill>
+                  <a:srgbClr val="595959"/>
+                </a:solidFill>
+                <a:latin typeface="맑은 고딕"/>
+              </a:rPr>
+              <a:t>   ECS 프로그램 이력</a:t>
+            </a:r>
+          </a:p>
+          <a:p>
+            <a:pPr algn="l"/>
+            <a:r>
+              <a:rPr sz="1100" b="0">
+                <a:solidFill>
+                  <a:srgbClr val="595959"/>
+                </a:solidFill>
+                <a:latin typeface="맑은 고딕"/>
+              </a:rPr>
+              <a:t>   알람 (경고창)</a:t>
+            </a:r>
+          </a:p>
+          <a:p>
+            <a:pPr algn="l"/>
+            <a:r>
+              <a:rPr sz="600" b="0">
+                <a:solidFill>
+                  <a:srgbClr val="595959"/>
+                </a:solidFill>
+                <a:latin typeface="맑은 고딕"/>
+              </a:rPr>
+              <a:t/>
+            </a:r>
+          </a:p>
+        </p:txBody>
+      </p:sp>
+      <p:sp>
+        <p:nvSpPr>
+          <p:cNvPr id="6" name="TextBox 5"/>
+          <p:cNvSpPr txBox="1"/>
+          <p:nvPr/>
+        </p:nvSpPr>
+        <p:spPr>
+          <a:xfrm>
+            <a:off x="457200" y="6446520"/>
+            <a:ext cx="4572000" cy="320040"/>
+          </a:xfrm>
+          <a:prstGeom prst="rect">
+            <a:avLst/>
+          </a:prstGeom>
+          <a:noFill/>
+        </p:spPr>
+        <p:txBody>
+          <a:bodyPr wrap="square" anchor="t" lIns="45720" rIns="45720">
+            <a:spAutoFit/>
+          </a:bodyPr>
+          <a:lstStyle/>
+          <a:p>
+            <a:pPr algn="l"/>
+            <a:r>
+              <a:rPr sz="1000" b="0">
+                <a:solidFill>
+                  <a:srgbClr val="595959"/>
+                </a:solidFill>
+                <a:latin typeface="맑은 고딕"/>
+              </a:rPr>
+              <a:t>LG 화학 1동 ECS  |  화면설계서  |  Ver 1.4</a:t>
+            </a:r>
+          </a:p>
+        </p:txBody>
+      </p:sp>
+      <p:sp>
+        <p:nvSpPr>
+          <p:cNvPr id="7" name="TextBox 6"/>
+          <p:cNvSpPr txBox="1"/>
+          <p:nvPr/>
+        </p:nvSpPr>
+        <p:spPr>
+          <a:xfrm>
+            <a:off x="11155680" y="6446520"/>
+            <a:ext cx="731520" cy="320040"/>
+          </a:xfrm>
+          <a:prstGeom prst="rect">
+            <a:avLst/>
+          </a:prstGeom>
+          <a:noFill/>
+        </p:spPr>
+        <p:txBody>
+          <a:bodyPr wrap="square" anchor="t" lIns="45720" rIns="45720">
+            <a:spAutoFit/>
+          </a:bodyPr>
+          <a:lstStyle/>
+          <a:p>
+            <a:pPr algn="r"/>
+            <a:r>
+              <a:rPr sz="1000" b="0">
+                <a:solidFill>
+                  <a:srgbClr val="595959"/>
+                </a:solidFill>
+                <a:latin typeface="맑은 고딕"/>
+              </a:rPr>
+              <a:t>3</a:t>
             </a:r>
           </a:p>
         </p:txBody>
@@ -14801,7 +13069,7 @@
                 </a:solidFill>
                 <a:latin typeface="맑은 고딕"/>
               </a:rPr>
-              <a:t>LG 화학 1동 ECS  |  화면설계서  |  Ver 1.3</a:t>
+              <a:t>LG 화학 1동 ECS  |  화면설계서  |  Ver 1.4</a:t>
             </a:r>
           </a:p>
         </p:txBody>
@@ -15443,7 +13711,7 @@
                 </a:solidFill>
                 <a:latin typeface="맑은 고딕"/>
               </a:rPr>
-              <a:t>LG 화학 1동 ECS  |  화면설계서  |  Ver 1.3</a:t>
+              <a:t>LG 화학 1동 ECS  |  화면설계서  |  Ver 1.4</a:t>
             </a:r>
           </a:p>
         </p:txBody>
@@ -15651,8 +13919,8 @@
         </p:blipFill>
         <p:spPr>
           <a:xfrm>
-            <a:off x="2274570" y="1828800"/>
-            <a:ext cx="5143500" cy="822960"/>
+            <a:off x="3200400" y="1828800"/>
+            <a:ext cx="3291839" cy="822959"/>
           </a:xfrm>
           <a:prstGeom prst="rect">
             <a:avLst/>
@@ -16143,7 +14411,7 @@
                           </a:solidFill>
                           <a:latin typeface="맑은 고딕"/>
                         </a:rPr>
-                        <a:t>작업 · 크레인 · RTV</a:t>
+                        <a:t>작업</a:t>
                       </a:r>
                     </a:p>
                   </a:txBody>
@@ -16165,7 +14433,7 @@
                           </a:solidFill>
                           <a:latin typeface="맑은 고딕"/>
                         </a:rPr>
-                        <a:t>반자동 TEST 그룹 숨김(SEMITEST_MENU=0)</a:t>
+                        <a:t>크레인 · RTV 수동지시 폐기(2026-09-28), 반자동 TEST 그룹 숨김(SEMITEST_MENU=0)</a:t>
                       </a:r>
                     </a:p>
                   </a:txBody>
@@ -16390,7 +14658,7 @@
                 </a:solidFill>
                 <a:latin typeface="맑은 고딕"/>
               </a:rPr>
-              <a:t>LG 화학 1동 ECS  |  화면설계서  |  Ver 1.3</a:t>
+              <a:t>LG 화학 1동 ECS  |  화면설계서  |  Ver 1.4</a:t>
             </a:r>
           </a:p>
         </p:txBody>
@@ -16637,7 +14905,7 @@
                 </a:solidFill>
                 <a:latin typeface="맑은 고딕"/>
               </a:rPr>
-              <a:t>LG 화학 1동 ECS  |  화면설계서  |  Ver 1.3</a:t>
+              <a:t>LG 화학 1동 ECS  |  화면설계서  |  Ver 1.4</a:t>
             </a:r>
           </a:p>
         </p:txBody>
@@ -16972,7 +15240,7 @@
                 </a:solidFill>
                 <a:latin typeface="맑은 고딕"/>
               </a:rPr>
-              <a:t>LG 화학 1동 ECS  |  화면설계서  |  Ver 1.3</a:t>
+              <a:t>LG 화학 1동 ECS  |  화면설계서  |  Ver 1.4</a:t>
             </a:r>
           </a:p>
         </p:txBody>
@@ -17678,7 +15946,7 @@
                 </a:solidFill>
                 <a:latin typeface="맑은 고딕"/>
               </a:rPr>
-              <a:t>LG 화학 1동 ECS  |  화면설계서  |  Ver 1.3</a:t>
+              <a:t>LG 화학 1동 ECS  |  화면설계서  |  Ver 1.4</a:t>
             </a:r>
           </a:p>
         </p:txBody>

--- a/docs/산출물_20260927/06_ECS_화면설계서.pptx
+++ b/docs/산출물_20260927/06_ECS_화면설계서.pptx
@@ -12416,7 +12416,7 @@
                 </a:solidFill>
                 <a:latin typeface="맑은 고딕"/>
               </a:rPr>
-              <a:t>   왼쪽 고정 칸 ① 통신 상태 · 범례</a:t>
+              <a:t>   왼쪽 고정 칸 ① 범례</a:t>
             </a:r>
           </a:p>
           <a:p>
@@ -15335,7 +15335,7 @@
       </p:sp>
       <p:pic>
         <p:nvPicPr>
-          <p:cNvPr id="3" name="Picture 2" descr="layout.png"/>
+          <p:cNvPr id="3" name="Picture 2" descr="main_full.png"/>
           <p:cNvPicPr>
             <a:picLocks noChangeAspect="1"/>
           </p:cNvPicPr>
@@ -15349,8 +15349,8 @@
         </p:blipFill>
         <p:spPr>
           <a:xfrm>
-            <a:off x="457200" y="1097280"/>
-            <a:ext cx="5212080" cy="3927032"/>
+            <a:off x="320040" y="1737360"/>
+            <a:ext cx="5349240" cy="2895662"/>
           </a:xfrm>
           <a:prstGeom prst="rect">
             <a:avLst/>
